--- a/outputs/4971-mec-slides.pptx
+++ b/outputs/4971-mec-slides.pptx
@@ -3183,14 +3183,14 @@
           <a:noFill/>
         </p:spPr>
         <p:txBody>
-          <a:bodyPr wrap="square" lIns="45720" rIns="45720" tIns="18288" bIns="18288">
-            <a:spAutoFit/>
+          <a:bodyPr wrap="square" anchor="t" lIns="0" rIns="0" tIns="0" bIns="0">
+            <a:noAutofit/>
           </a:bodyPr>
           <a:lstStyle/>
           <a:p>
             <a:pPr algn="ctr"/>
             <a:r>
-              <a:rPr sz="5400" b="1">
+              <a:rPr sz="5400" b="1" i="0">
                 <a:solidFill>
                   <a:srgbClr val="1F4E78"/>
                 </a:solidFill>
@@ -3217,14 +3217,14 @@
           <a:noFill/>
         </p:spPr>
         <p:txBody>
-          <a:bodyPr wrap="square" lIns="45720" rIns="45720" tIns="18288" bIns="18288">
-            <a:spAutoFit/>
+          <a:bodyPr wrap="square" anchor="t" lIns="0" rIns="0" tIns="0" bIns="0">
+            <a:noAutofit/>
           </a:bodyPr>
           <a:lstStyle/>
           <a:p>
             <a:pPr algn="ctr"/>
             <a:r>
-              <a:rPr sz="2600" b="0">
+              <a:rPr sz="2600" b="0" i="0">
                 <a:solidFill>
                   <a:srgbClr val="202020"/>
                 </a:solidFill>
@@ -3251,14 +3251,14 @@
           <a:noFill/>
         </p:spPr>
         <p:txBody>
-          <a:bodyPr wrap="square" lIns="45720" rIns="45720" tIns="18288" bIns="18288">
-            <a:spAutoFit/>
+          <a:bodyPr wrap="square" anchor="t" lIns="0" rIns="0" tIns="0" bIns="0">
+            <a:noAutofit/>
           </a:bodyPr>
           <a:lstStyle/>
           <a:p>
             <a:pPr algn="ctr"/>
             <a:r>
-              <a:rPr sz="2600" b="0">
+              <a:rPr sz="2600" b="0" i="0">
                 <a:solidFill>
                   <a:srgbClr val="202020"/>
                 </a:solidFill>
@@ -3285,14 +3285,14 @@
           <a:noFill/>
         </p:spPr>
         <p:txBody>
-          <a:bodyPr wrap="square" lIns="45720" rIns="45720" tIns="18288" bIns="18288">
-            <a:spAutoFit/>
+          <a:bodyPr wrap="square" anchor="t" lIns="0" rIns="0" tIns="0" bIns="0">
+            <a:noAutofit/>
           </a:bodyPr>
           <a:lstStyle/>
           <a:p>
             <a:pPr algn="ctr"/>
             <a:r>
-              <a:rPr sz="2600" b="0">
+              <a:rPr sz="2600" b="0" i="0">
                 <a:solidFill>
                   <a:srgbClr val="202020"/>
                 </a:solidFill>
@@ -3319,14 +3319,14 @@
           <a:noFill/>
         </p:spPr>
         <p:txBody>
-          <a:bodyPr wrap="square" lIns="45720" rIns="45720" tIns="18288" bIns="18288">
-            <a:spAutoFit/>
+          <a:bodyPr wrap="square" anchor="t" lIns="0" rIns="0" tIns="0" bIns="0">
+            <a:noAutofit/>
           </a:bodyPr>
           <a:lstStyle/>
           <a:p>
             <a:pPr algn="ctr"/>
             <a:r>
-              <a:rPr sz="1800" b="0">
+              <a:rPr sz="1800" b="0" i="0">
                 <a:solidFill>
                   <a:srgbClr val="808080"/>
                 </a:solidFill>
@@ -3405,8 +3405,8 @@
         </p:nvSpPr>
         <p:spPr>
           <a:xfrm>
-            <a:off x="457200" y="457200"/>
-            <a:ext cx="11277295" cy="822960"/>
+            <a:off x="457200" y="365760"/>
+            <a:ext cx="11277295" cy="914400"/>
           </a:xfrm>
           <a:prstGeom prst="rect">
             <a:avLst/>
@@ -3414,14 +3414,14 @@
           <a:noFill/>
         </p:spPr>
         <p:txBody>
-          <a:bodyPr wrap="square" lIns="45720" rIns="45720" tIns="18288" bIns="18288">
-            <a:spAutoFit/>
+          <a:bodyPr wrap="square" anchor="ctr" lIns="0" rIns="0" tIns="0" bIns="0">
+            <a:noAutofit/>
           </a:bodyPr>
           <a:lstStyle/>
           <a:p>
             <a:pPr algn="l"/>
             <a:r>
-              <a:rPr sz="3000" b="1">
+              <a:rPr sz="2800" b="1" i="0">
                 <a:solidFill>
                   <a:srgbClr val="1F4E78"/>
                 </a:solidFill>
@@ -3439,8 +3439,8 @@
         </p:nvSpPr>
         <p:spPr>
           <a:xfrm>
-            <a:off x="457200" y="1234440"/>
-            <a:ext cx="1828800" cy="36576"/>
+            <a:off x="457200" y="1298448"/>
+            <a:ext cx="2194560" cy="36576"/>
           </a:xfrm>
           <a:prstGeom prst="rect">
             <a:avLst/>
@@ -3482,8 +3482,8 @@
         </p:nvSpPr>
         <p:spPr>
           <a:xfrm>
-            <a:off x="457200" y="1463040"/>
-            <a:ext cx="11277295" cy="640080"/>
+            <a:off x="457200" y="1508760"/>
+            <a:ext cx="11277295" cy="502920"/>
           </a:xfrm>
           <a:prstGeom prst="rect">
             <a:avLst/>
@@ -3491,14 +3491,14 @@
           <a:noFill/>
         </p:spPr>
         <p:txBody>
-          <a:bodyPr wrap="square" lIns="45720" rIns="45720" tIns="18288" bIns="18288">
-            <a:spAutoFit/>
+          <a:bodyPr wrap="square" anchor="ctr" lIns="0" rIns="0" tIns="0" bIns="0">
+            <a:noAutofit/>
           </a:bodyPr>
           <a:lstStyle/>
           <a:p>
             <a:pPr algn="l"/>
             <a:r>
-              <a:rPr sz="2200" b="1">
+              <a:rPr sz="2000" b="1" i="0">
                 <a:solidFill>
                   <a:srgbClr val="C0392B"/>
                 </a:solidFill>
@@ -3516,8 +3516,8 @@
         </p:nvSpPr>
         <p:spPr>
           <a:xfrm>
-            <a:off x="731520" y="2286000"/>
-            <a:ext cx="10728655" cy="3977640"/>
+            <a:off x="731520" y="2148840"/>
+            <a:ext cx="10728655" cy="4114800"/>
           </a:xfrm>
           <a:prstGeom prst="rect">
             <a:avLst/>
@@ -3525,8 +3525,8 @@
           <a:noFill/>
         </p:spPr>
         <p:txBody>
-          <a:bodyPr wrap="none" tIns="91440">
-            <a:spAutoFit/>
+          <a:bodyPr wrap="none" anchor="t" tIns="91440">
+            <a:noAutofit/>
           </a:bodyPr>
           <a:lstStyle/>
           <a:p>
@@ -3580,8 +3580,8 @@
         </p:nvSpPr>
         <p:spPr>
           <a:xfrm>
-            <a:off x="457200" y="457200"/>
-            <a:ext cx="11277295" cy="822960"/>
+            <a:off x="457200" y="365760"/>
+            <a:ext cx="11277295" cy="914400"/>
           </a:xfrm>
           <a:prstGeom prst="rect">
             <a:avLst/>
@@ -3589,14 +3589,14 @@
           <a:noFill/>
         </p:spPr>
         <p:txBody>
-          <a:bodyPr wrap="square" lIns="45720" rIns="45720" tIns="18288" bIns="18288">
-            <a:spAutoFit/>
+          <a:bodyPr wrap="square" anchor="ctr" lIns="0" rIns="0" tIns="0" bIns="0">
+            <a:noAutofit/>
           </a:bodyPr>
           <a:lstStyle/>
           <a:p>
             <a:pPr algn="l"/>
             <a:r>
-              <a:rPr sz="3000" b="1">
+              <a:rPr sz="2800" b="1" i="0">
                 <a:solidFill>
                   <a:srgbClr val="1F4E78"/>
                 </a:solidFill>
@@ -3614,8 +3614,8 @@
         </p:nvSpPr>
         <p:spPr>
           <a:xfrm>
-            <a:off x="457200" y="1234440"/>
-            <a:ext cx="1828800" cy="36576"/>
+            <a:off x="457200" y="1298448"/>
+            <a:ext cx="2194560" cy="36576"/>
           </a:xfrm>
           <a:prstGeom prst="rect">
             <a:avLst/>
@@ -3657,8 +3657,8 @@
         </p:nvSpPr>
         <p:spPr>
           <a:xfrm>
-            <a:off x="457200" y="1463040"/>
-            <a:ext cx="11277295" cy="640080"/>
+            <a:off x="457200" y="1508760"/>
+            <a:ext cx="11277295" cy="502920"/>
           </a:xfrm>
           <a:prstGeom prst="rect">
             <a:avLst/>
@@ -3666,14 +3666,14 @@
           <a:noFill/>
         </p:spPr>
         <p:txBody>
-          <a:bodyPr wrap="square" lIns="45720" rIns="45720" tIns="18288" bIns="18288">
-            <a:spAutoFit/>
+          <a:bodyPr wrap="square" anchor="ctr" lIns="0" rIns="0" tIns="0" bIns="0">
+            <a:noAutofit/>
           </a:bodyPr>
           <a:lstStyle/>
           <a:p>
             <a:pPr algn="l"/>
             <a:r>
-              <a:rPr sz="2200" b="1">
+              <a:rPr sz="2000" b="1" i="0">
                 <a:solidFill>
                   <a:srgbClr val="C0392B"/>
                 </a:solidFill>
@@ -3691,8 +3691,8 @@
         </p:nvSpPr>
         <p:spPr>
           <a:xfrm>
-            <a:off x="640080" y="2286000"/>
-            <a:ext cx="10911535" cy="4069080"/>
+            <a:off x="640080" y="2148840"/>
+            <a:ext cx="10911535" cy="4114800"/>
           </a:xfrm>
           <a:prstGeom prst="rect">
             <a:avLst/>
@@ -3700,15 +3700,18 @@
           <a:noFill/>
         </p:spPr>
         <p:txBody>
-          <a:bodyPr wrap="square" lIns="45720" rIns="45720">
-            <a:spAutoFit/>
+          <a:bodyPr wrap="square" anchor="t" lIns="0" rIns="0" tIns="0" bIns="0">
+            <a:noAutofit/>
           </a:bodyPr>
           <a:lstStyle/>
           <a:p>
             <a:pPr algn="l">
               <a:lnSpc>
-                <a:spcPct val="130000"/>
+                <a:spcPct val="135000"/>
               </a:lnSpc>
+              <a:spcAft>
+                <a:spcPts val="600"/>
+              </a:spcAft>
             </a:pPr>
             <a:r>
               <a:rPr sz="1800">
@@ -3722,8 +3725,11 @@
           <a:p>
             <a:pPr algn="l">
               <a:lnSpc>
-                <a:spcPct val="130000"/>
+                <a:spcPct val="135000"/>
               </a:lnSpc>
+              <a:spcAft>
+                <a:spcPts val="600"/>
+              </a:spcAft>
             </a:pPr>
             <a:r>
               <a:rPr sz="1800">
@@ -3737,8 +3743,11 @@
           <a:p>
             <a:pPr algn="l">
               <a:lnSpc>
-                <a:spcPct val="130000"/>
+                <a:spcPct val="135000"/>
               </a:lnSpc>
+              <a:spcAft>
+                <a:spcPts val="600"/>
+              </a:spcAft>
             </a:pPr>
             <a:r>
               <a:rPr sz="1800">
@@ -3752,8 +3761,11 @@
           <a:p>
             <a:pPr algn="l">
               <a:lnSpc>
-                <a:spcPct val="130000"/>
+                <a:spcPct val="135000"/>
               </a:lnSpc>
+              <a:spcAft>
+                <a:spcPts val="600"/>
+              </a:spcAft>
             </a:pPr>
             <a:r>
               <a:rPr sz="1800">
@@ -3783,14 +3795,14 @@
           <a:noFill/>
         </p:spPr>
         <p:txBody>
-          <a:bodyPr wrap="square" lIns="45720" rIns="45720" tIns="18288" bIns="18288">
-            <a:spAutoFit/>
+          <a:bodyPr wrap="square" anchor="ctr" lIns="0" rIns="0" tIns="0" bIns="0">
+            <a:noAutofit/>
           </a:bodyPr>
           <a:lstStyle/>
           <a:p>
             <a:pPr algn="l"/>
             <a:r>
-              <a:rPr sz="1100" b="0">
+              <a:rPr sz="1100" b="0" i="1">
                 <a:solidFill>
                   <a:srgbClr val="808080"/>
                 </a:solidFill>
@@ -3826,8 +3838,8 @@
         </p:nvSpPr>
         <p:spPr>
           <a:xfrm>
-            <a:off x="457200" y="457200"/>
-            <a:ext cx="11277295" cy="822960"/>
+            <a:off x="457200" y="365760"/>
+            <a:ext cx="11277295" cy="914400"/>
           </a:xfrm>
           <a:prstGeom prst="rect">
             <a:avLst/>
@@ -3835,14 +3847,14 @@
           <a:noFill/>
         </p:spPr>
         <p:txBody>
-          <a:bodyPr wrap="square" lIns="45720" rIns="45720" tIns="18288" bIns="18288">
-            <a:spAutoFit/>
+          <a:bodyPr wrap="square" anchor="ctr" lIns="0" rIns="0" tIns="0" bIns="0">
+            <a:noAutofit/>
           </a:bodyPr>
           <a:lstStyle/>
           <a:p>
             <a:pPr algn="l"/>
             <a:r>
-              <a:rPr sz="3000" b="1">
+              <a:rPr sz="2800" b="1" i="0">
                 <a:solidFill>
                   <a:srgbClr val="1F4E78"/>
                 </a:solidFill>
@@ -3860,8 +3872,8 @@
         </p:nvSpPr>
         <p:spPr>
           <a:xfrm>
-            <a:off x="457200" y="1234440"/>
-            <a:ext cx="1828800" cy="36576"/>
+            <a:off x="457200" y="1298448"/>
+            <a:ext cx="2194560" cy="36576"/>
           </a:xfrm>
           <a:prstGeom prst="rect">
             <a:avLst/>
@@ -3903,8 +3915,8 @@
         </p:nvSpPr>
         <p:spPr>
           <a:xfrm>
-            <a:off x="457200" y="1463040"/>
-            <a:ext cx="11277295" cy="640080"/>
+            <a:off x="457200" y="1508760"/>
+            <a:ext cx="11277295" cy="502920"/>
           </a:xfrm>
           <a:prstGeom prst="rect">
             <a:avLst/>
@@ -3912,14 +3924,14 @@
           <a:noFill/>
         </p:spPr>
         <p:txBody>
-          <a:bodyPr wrap="square" lIns="45720" rIns="45720" tIns="18288" bIns="18288">
-            <a:spAutoFit/>
+          <a:bodyPr wrap="square" anchor="ctr" lIns="0" rIns="0" tIns="0" bIns="0">
+            <a:noAutofit/>
           </a:bodyPr>
           <a:lstStyle/>
           <a:p>
             <a:pPr algn="l"/>
             <a:r>
-              <a:rPr sz="2200" b="1">
+              <a:rPr sz="2000" b="1" i="0">
                 <a:solidFill>
                   <a:srgbClr val="C0392B"/>
                 </a:solidFill>
@@ -3937,8 +3949,8 @@
         </p:nvSpPr>
         <p:spPr>
           <a:xfrm>
-            <a:off x="731520" y="2286000"/>
-            <a:ext cx="10728655" cy="3977640"/>
+            <a:off x="731520" y="2148840"/>
+            <a:ext cx="10728655" cy="4114800"/>
           </a:xfrm>
           <a:prstGeom prst="rect">
             <a:avLst/>
@@ -3946,8 +3958,8 @@
           <a:noFill/>
         </p:spPr>
         <p:txBody>
-          <a:bodyPr wrap="none" tIns="91440">
-            <a:spAutoFit/>
+          <a:bodyPr wrap="none" anchor="t" tIns="91440">
+            <a:noAutofit/>
           </a:bodyPr>
           <a:lstStyle/>
           <a:p>
@@ -3990,14 +4002,14 @@
           <a:noFill/>
         </p:spPr>
         <p:txBody>
-          <a:bodyPr wrap="square" lIns="45720" rIns="45720" tIns="18288" bIns="18288">
-            <a:spAutoFit/>
+          <a:bodyPr wrap="square" anchor="ctr" lIns="0" rIns="0" tIns="0" bIns="0">
+            <a:noAutofit/>
           </a:bodyPr>
           <a:lstStyle/>
           <a:p>
             <a:pPr algn="l"/>
             <a:r>
-              <a:rPr sz="1100" b="0">
+              <a:rPr sz="1100" b="0" i="1">
                 <a:solidFill>
                   <a:srgbClr val="808080"/>
                 </a:solidFill>
@@ -4033,8 +4045,8 @@
         </p:nvSpPr>
         <p:spPr>
           <a:xfrm>
-            <a:off x="457200" y="457200"/>
-            <a:ext cx="11277295" cy="822960"/>
+            <a:off x="457200" y="365760"/>
+            <a:ext cx="11277295" cy="914400"/>
           </a:xfrm>
           <a:prstGeom prst="rect">
             <a:avLst/>
@@ -4042,14 +4054,14 @@
           <a:noFill/>
         </p:spPr>
         <p:txBody>
-          <a:bodyPr wrap="square" lIns="45720" rIns="45720" tIns="18288" bIns="18288">
-            <a:spAutoFit/>
+          <a:bodyPr wrap="square" anchor="ctr" lIns="0" rIns="0" tIns="0" bIns="0">
+            <a:noAutofit/>
           </a:bodyPr>
           <a:lstStyle/>
           <a:p>
             <a:pPr algn="l"/>
             <a:r>
-              <a:rPr sz="3000" b="1">
+              <a:rPr sz="2800" b="1" i="0">
                 <a:solidFill>
                   <a:srgbClr val="1F4E78"/>
                 </a:solidFill>
@@ -4067,8 +4079,8 @@
         </p:nvSpPr>
         <p:spPr>
           <a:xfrm>
-            <a:off x="457200" y="1234440"/>
-            <a:ext cx="1828800" cy="36576"/>
+            <a:off x="457200" y="1298448"/>
+            <a:ext cx="2194560" cy="36576"/>
           </a:xfrm>
           <a:prstGeom prst="rect">
             <a:avLst/>
@@ -4110,8 +4122,8 @@
         </p:nvSpPr>
         <p:spPr>
           <a:xfrm>
-            <a:off x="822960" y="1463040"/>
-            <a:ext cx="10545775" cy="4892040"/>
+            <a:off x="822960" y="2148840"/>
+            <a:ext cx="10545775" cy="4114800"/>
           </a:xfrm>
           <a:prstGeom prst="rect">
             <a:avLst/>
@@ -4119,15 +4131,18 @@
           <a:noFill/>
         </p:spPr>
         <p:txBody>
-          <a:bodyPr wrap="square" lIns="45720" rIns="45720">
-            <a:spAutoFit/>
+          <a:bodyPr wrap="square" anchor="t" lIns="0" rIns="0" tIns="0" bIns="0">
+            <a:noAutofit/>
           </a:bodyPr>
           <a:lstStyle/>
           <a:p>
             <a:pPr algn="l">
               <a:lnSpc>
-                <a:spcPct val="130000"/>
+                <a:spcPct val="135000"/>
               </a:lnSpc>
+              <a:spcAft>
+                <a:spcPts val="600"/>
+              </a:spcAft>
             </a:pPr>
             <a:r>
               <a:rPr sz="2200">
@@ -4218,14 +4233,14 @@
           <a:noFill/>
         </p:spPr>
         <p:txBody>
-          <a:bodyPr wrap="square" lIns="45720" rIns="45720" tIns="18288" bIns="18288">
-            <a:spAutoFit/>
+          <a:bodyPr wrap="square" anchor="ctr" lIns="0" rIns="0" tIns="0" bIns="0">
+            <a:noAutofit/>
           </a:bodyPr>
           <a:lstStyle/>
           <a:p>
             <a:pPr algn="ctr"/>
             <a:r>
-              <a:rPr sz="5800" b="1">
+              <a:rPr sz="5800" b="1" i="0">
                 <a:solidFill>
                   <a:srgbClr val="FFFFFF"/>
                 </a:solidFill>
@@ -4261,8 +4276,8 @@
         </p:nvSpPr>
         <p:spPr>
           <a:xfrm>
-            <a:off x="457200" y="457200"/>
-            <a:ext cx="11277295" cy="822960"/>
+            <a:off x="457200" y="365760"/>
+            <a:ext cx="11277295" cy="914400"/>
           </a:xfrm>
           <a:prstGeom prst="rect">
             <a:avLst/>
@@ -4270,14 +4285,14 @@
           <a:noFill/>
         </p:spPr>
         <p:txBody>
-          <a:bodyPr wrap="square" lIns="45720" rIns="45720" tIns="18288" bIns="18288">
-            <a:spAutoFit/>
+          <a:bodyPr wrap="square" anchor="ctr" lIns="0" rIns="0" tIns="0" bIns="0">
+            <a:noAutofit/>
           </a:bodyPr>
           <a:lstStyle/>
           <a:p>
             <a:pPr algn="l"/>
             <a:r>
-              <a:rPr sz="3000" b="1">
+              <a:rPr sz="2800" b="1" i="0">
                 <a:solidFill>
                   <a:srgbClr val="1F4E78"/>
                 </a:solidFill>
@@ -4295,8 +4310,8 @@
         </p:nvSpPr>
         <p:spPr>
           <a:xfrm>
-            <a:off x="457200" y="1234440"/>
-            <a:ext cx="1828800" cy="36576"/>
+            <a:off x="457200" y="1298448"/>
+            <a:ext cx="2194560" cy="36576"/>
           </a:xfrm>
           <a:prstGeom prst="rect">
             <a:avLst/>
@@ -4338,8 +4353,8 @@
         </p:nvSpPr>
         <p:spPr>
           <a:xfrm>
-            <a:off x="457200" y="1463040"/>
-            <a:ext cx="11277295" cy="640080"/>
+            <a:off x="457200" y="1508760"/>
+            <a:ext cx="11277295" cy="502920"/>
           </a:xfrm>
           <a:prstGeom prst="rect">
             <a:avLst/>
@@ -4347,14 +4362,14 @@
           <a:noFill/>
         </p:spPr>
         <p:txBody>
-          <a:bodyPr wrap="square" lIns="45720" rIns="45720" tIns="18288" bIns="18288">
-            <a:spAutoFit/>
+          <a:bodyPr wrap="square" anchor="ctr" lIns="0" rIns="0" tIns="0" bIns="0">
+            <a:noAutofit/>
           </a:bodyPr>
           <a:lstStyle/>
           <a:p>
             <a:pPr algn="l"/>
             <a:r>
-              <a:rPr sz="2200" b="1">
+              <a:rPr sz="2000" b="1" i="0">
                 <a:solidFill>
                   <a:srgbClr val="C0392B"/>
                 </a:solidFill>
@@ -4373,7 +4388,7 @@
           <p:nvPr/>
         </p:nvGraphicFramePr>
         <p:xfrm>
-          <a:off x="457200" y="2286000"/>
+          <a:off x="457200" y="2148840"/>
           <a:ext cx="11277295" cy="1828800"/>
         </p:xfrm>
         <a:graphic>
@@ -4680,14 +4695,14 @@
           <a:noFill/>
         </p:spPr>
         <p:txBody>
-          <a:bodyPr wrap="square" lIns="45720" rIns="45720" tIns="18288" bIns="18288">
-            <a:spAutoFit/>
+          <a:bodyPr wrap="square" anchor="ctr" lIns="0" rIns="0" tIns="0" bIns="0">
+            <a:noAutofit/>
           </a:bodyPr>
           <a:lstStyle/>
           <a:p>
             <a:pPr algn="l"/>
             <a:r>
-              <a:rPr sz="1100" b="0">
+              <a:rPr sz="1100" b="0" i="1">
                 <a:solidFill>
                   <a:srgbClr val="808080"/>
                 </a:solidFill>
@@ -4723,8 +4738,8 @@
         </p:nvSpPr>
         <p:spPr>
           <a:xfrm>
-            <a:off x="457200" y="457200"/>
-            <a:ext cx="11277295" cy="822960"/>
+            <a:off x="457200" y="365760"/>
+            <a:ext cx="11277295" cy="914400"/>
           </a:xfrm>
           <a:prstGeom prst="rect">
             <a:avLst/>
@@ -4732,14 +4747,14 @@
           <a:noFill/>
         </p:spPr>
         <p:txBody>
-          <a:bodyPr wrap="square" lIns="45720" rIns="45720" tIns="18288" bIns="18288">
-            <a:spAutoFit/>
+          <a:bodyPr wrap="square" anchor="ctr" lIns="0" rIns="0" tIns="0" bIns="0">
+            <a:noAutofit/>
           </a:bodyPr>
           <a:lstStyle/>
           <a:p>
             <a:pPr algn="l"/>
             <a:r>
-              <a:rPr sz="3000" b="1">
+              <a:rPr sz="2800" b="1" i="0">
                 <a:solidFill>
                   <a:srgbClr val="1F4E78"/>
                 </a:solidFill>
@@ -4757,8 +4772,8 @@
         </p:nvSpPr>
         <p:spPr>
           <a:xfrm>
-            <a:off x="457200" y="1234440"/>
-            <a:ext cx="1828800" cy="36576"/>
+            <a:off x="457200" y="1298448"/>
+            <a:ext cx="2194560" cy="36576"/>
           </a:xfrm>
           <a:prstGeom prst="rect">
             <a:avLst/>
@@ -4800,8 +4815,8 @@
         </p:nvSpPr>
         <p:spPr>
           <a:xfrm>
-            <a:off x="457200" y="1463040"/>
-            <a:ext cx="11277295" cy="640080"/>
+            <a:off x="457200" y="1508760"/>
+            <a:ext cx="11277295" cy="502920"/>
           </a:xfrm>
           <a:prstGeom prst="rect">
             <a:avLst/>
@@ -4809,14 +4824,14 @@
           <a:noFill/>
         </p:spPr>
         <p:txBody>
-          <a:bodyPr wrap="square" lIns="45720" rIns="45720" tIns="18288" bIns="18288">
-            <a:spAutoFit/>
+          <a:bodyPr wrap="square" anchor="ctr" lIns="0" rIns="0" tIns="0" bIns="0">
+            <a:noAutofit/>
           </a:bodyPr>
           <a:lstStyle/>
           <a:p>
             <a:pPr algn="l"/>
             <a:r>
-              <a:rPr sz="2200" b="1">
+              <a:rPr sz="2000" b="1" i="0">
                 <a:solidFill>
                   <a:srgbClr val="C0392B"/>
                 </a:solidFill>
@@ -4834,8 +4849,8 @@
         </p:nvSpPr>
         <p:spPr>
           <a:xfrm>
-            <a:off x="731520" y="2286000"/>
-            <a:ext cx="10728655" cy="3977640"/>
+            <a:off x="731520" y="2148840"/>
+            <a:ext cx="10728655" cy="4114800"/>
           </a:xfrm>
           <a:prstGeom prst="rect">
             <a:avLst/>
@@ -4843,8 +4858,8 @@
           <a:noFill/>
         </p:spPr>
         <p:txBody>
-          <a:bodyPr wrap="none" tIns="91440">
-            <a:spAutoFit/>
+          <a:bodyPr wrap="none" anchor="t" tIns="91440">
+            <a:noAutofit/>
           </a:bodyPr>
           <a:lstStyle/>
           <a:p>
@@ -4897,8 +4912,8 @@
         </p:nvSpPr>
         <p:spPr>
           <a:xfrm>
-            <a:off x="457200" y="457200"/>
-            <a:ext cx="11277295" cy="822960"/>
+            <a:off x="457200" y="365760"/>
+            <a:ext cx="11277295" cy="914400"/>
           </a:xfrm>
           <a:prstGeom prst="rect">
             <a:avLst/>
@@ -4906,14 +4921,14 @@
           <a:noFill/>
         </p:spPr>
         <p:txBody>
-          <a:bodyPr wrap="square" lIns="45720" rIns="45720" tIns="18288" bIns="18288">
-            <a:spAutoFit/>
+          <a:bodyPr wrap="square" anchor="ctr" lIns="0" rIns="0" tIns="0" bIns="0">
+            <a:noAutofit/>
           </a:bodyPr>
           <a:lstStyle/>
           <a:p>
             <a:pPr algn="l"/>
             <a:r>
-              <a:rPr sz="3000" b="1">
+              <a:rPr sz="2800" b="1" i="0">
                 <a:solidFill>
                   <a:srgbClr val="1F4E78"/>
                 </a:solidFill>
@@ -4931,8 +4946,8 @@
         </p:nvSpPr>
         <p:spPr>
           <a:xfrm>
-            <a:off x="457200" y="1234440"/>
-            <a:ext cx="1828800" cy="36576"/>
+            <a:off x="457200" y="1298448"/>
+            <a:ext cx="2194560" cy="36576"/>
           </a:xfrm>
           <a:prstGeom prst="rect">
             <a:avLst/>
@@ -4974,8 +4989,8 @@
         </p:nvSpPr>
         <p:spPr>
           <a:xfrm>
-            <a:off x="457200" y="1463040"/>
-            <a:ext cx="11277295" cy="640080"/>
+            <a:off x="457200" y="1508760"/>
+            <a:ext cx="11277295" cy="502920"/>
           </a:xfrm>
           <a:prstGeom prst="rect">
             <a:avLst/>
@@ -4983,14 +4998,14 @@
           <a:noFill/>
         </p:spPr>
         <p:txBody>
-          <a:bodyPr wrap="square" lIns="45720" rIns="45720" tIns="18288" bIns="18288">
-            <a:spAutoFit/>
+          <a:bodyPr wrap="square" anchor="ctr" lIns="0" rIns="0" tIns="0" bIns="0">
+            <a:noAutofit/>
           </a:bodyPr>
           <a:lstStyle/>
           <a:p>
             <a:pPr algn="l"/>
             <a:r>
-              <a:rPr sz="2200" b="1">
+              <a:rPr sz="2000" b="1" i="0">
                 <a:solidFill>
                   <a:srgbClr val="C0392B"/>
                 </a:solidFill>
@@ -5009,7 +5024,7 @@
           <p:nvPr/>
         </p:nvGraphicFramePr>
         <p:xfrm>
-          <a:off x="457200" y="2286000"/>
+          <a:off x="457200" y="2148840"/>
           <a:ext cx="11277295" cy="1828800"/>
         </p:xfrm>
         <a:graphic>
@@ -5316,14 +5331,14 @@
           <a:noFill/>
         </p:spPr>
         <p:txBody>
-          <a:bodyPr wrap="square" lIns="45720" rIns="45720" tIns="18288" bIns="18288">
-            <a:spAutoFit/>
+          <a:bodyPr wrap="square" anchor="ctr" lIns="0" rIns="0" tIns="0" bIns="0">
+            <a:noAutofit/>
           </a:bodyPr>
           <a:lstStyle/>
           <a:p>
             <a:pPr algn="l"/>
             <a:r>
-              <a:rPr sz="1100" b="0">
+              <a:rPr sz="1100" b="0" i="1">
                 <a:solidFill>
                   <a:srgbClr val="808080"/>
                 </a:solidFill>
@@ -5359,8 +5374,8 @@
         </p:nvSpPr>
         <p:spPr>
           <a:xfrm>
-            <a:off x="457200" y="457200"/>
-            <a:ext cx="11277295" cy="822960"/>
+            <a:off x="457200" y="365760"/>
+            <a:ext cx="11277295" cy="914400"/>
           </a:xfrm>
           <a:prstGeom prst="rect">
             <a:avLst/>
@@ -5368,14 +5383,14 @@
           <a:noFill/>
         </p:spPr>
         <p:txBody>
-          <a:bodyPr wrap="square" lIns="45720" rIns="45720" tIns="18288" bIns="18288">
-            <a:spAutoFit/>
+          <a:bodyPr wrap="square" anchor="ctr" lIns="0" rIns="0" tIns="0" bIns="0">
+            <a:noAutofit/>
           </a:bodyPr>
           <a:lstStyle/>
           <a:p>
             <a:pPr algn="l"/>
             <a:r>
-              <a:rPr sz="3000" b="1">
+              <a:rPr sz="2800" b="1" i="0">
                 <a:solidFill>
                   <a:srgbClr val="1F4E78"/>
                 </a:solidFill>
@@ -5393,8 +5408,8 @@
         </p:nvSpPr>
         <p:spPr>
           <a:xfrm>
-            <a:off x="457200" y="1234440"/>
-            <a:ext cx="1828800" cy="36576"/>
+            <a:off x="457200" y="1298448"/>
+            <a:ext cx="2194560" cy="36576"/>
           </a:xfrm>
           <a:prstGeom prst="rect">
             <a:avLst/>
@@ -5436,8 +5451,8 @@
         </p:nvSpPr>
         <p:spPr>
           <a:xfrm>
-            <a:off x="457200" y="1463040"/>
-            <a:ext cx="11277295" cy="640080"/>
+            <a:off x="457200" y="1508760"/>
+            <a:ext cx="11277295" cy="502920"/>
           </a:xfrm>
           <a:prstGeom prst="rect">
             <a:avLst/>
@@ -5445,14 +5460,14 @@
           <a:noFill/>
         </p:spPr>
         <p:txBody>
-          <a:bodyPr wrap="square" lIns="45720" rIns="45720" tIns="18288" bIns="18288">
-            <a:spAutoFit/>
+          <a:bodyPr wrap="square" anchor="ctr" lIns="0" rIns="0" tIns="0" bIns="0">
+            <a:noAutofit/>
           </a:bodyPr>
           <a:lstStyle/>
           <a:p>
             <a:pPr algn="l"/>
             <a:r>
-              <a:rPr sz="2200" b="1">
+              <a:rPr sz="2000" b="1" i="0">
                 <a:solidFill>
                   <a:srgbClr val="C0392B"/>
                 </a:solidFill>
@@ -5471,7 +5486,7 @@
           <p:nvPr/>
         </p:nvGraphicFramePr>
         <p:xfrm>
-          <a:off x="457200" y="2286000"/>
+          <a:off x="457200" y="2148840"/>
           <a:ext cx="11277295" cy="2286000"/>
         </p:xfrm>
         <a:graphic>
@@ -5735,14 +5750,14 @@
           <a:noFill/>
         </p:spPr>
         <p:txBody>
-          <a:bodyPr wrap="square" lIns="45720" rIns="45720" tIns="18288" bIns="18288">
-            <a:spAutoFit/>
+          <a:bodyPr wrap="square" anchor="ctr" lIns="0" rIns="0" tIns="0" bIns="0">
+            <a:noAutofit/>
           </a:bodyPr>
           <a:lstStyle/>
           <a:p>
             <a:pPr algn="l"/>
             <a:r>
-              <a:rPr sz="1100" b="0">
+              <a:rPr sz="1100" b="0" i="1">
                 <a:solidFill>
                   <a:srgbClr val="808080"/>
                 </a:solidFill>
@@ -5778,8 +5793,8 @@
         </p:nvSpPr>
         <p:spPr>
           <a:xfrm>
-            <a:off x="457200" y="457200"/>
-            <a:ext cx="11277295" cy="822960"/>
+            <a:off x="457200" y="365760"/>
+            <a:ext cx="11277295" cy="914400"/>
           </a:xfrm>
           <a:prstGeom prst="rect">
             <a:avLst/>
@@ -5787,14 +5802,14 @@
           <a:noFill/>
         </p:spPr>
         <p:txBody>
-          <a:bodyPr wrap="square" lIns="45720" rIns="45720" tIns="18288" bIns="18288">
-            <a:spAutoFit/>
+          <a:bodyPr wrap="square" anchor="ctr" lIns="0" rIns="0" tIns="0" bIns="0">
+            <a:noAutofit/>
           </a:bodyPr>
           <a:lstStyle/>
           <a:p>
             <a:pPr algn="l"/>
             <a:r>
-              <a:rPr sz="3000" b="1">
+              <a:rPr sz="2800" b="1" i="0">
                 <a:solidFill>
                   <a:srgbClr val="1F4E78"/>
                 </a:solidFill>
@@ -5812,8 +5827,8 @@
         </p:nvSpPr>
         <p:spPr>
           <a:xfrm>
-            <a:off x="457200" y="1234440"/>
-            <a:ext cx="1828800" cy="36576"/>
+            <a:off x="457200" y="1298448"/>
+            <a:ext cx="2194560" cy="36576"/>
           </a:xfrm>
           <a:prstGeom prst="rect">
             <a:avLst/>
@@ -5855,8 +5870,8 @@
         </p:nvSpPr>
         <p:spPr>
           <a:xfrm>
-            <a:off x="457200" y="1463040"/>
-            <a:ext cx="11277295" cy="640080"/>
+            <a:off x="457200" y="1508760"/>
+            <a:ext cx="11277295" cy="502920"/>
           </a:xfrm>
           <a:prstGeom prst="rect">
             <a:avLst/>
@@ -5864,14 +5879,14 @@
           <a:noFill/>
         </p:spPr>
         <p:txBody>
-          <a:bodyPr wrap="square" lIns="45720" rIns="45720" tIns="18288" bIns="18288">
-            <a:spAutoFit/>
+          <a:bodyPr wrap="square" anchor="ctr" lIns="0" rIns="0" tIns="0" bIns="0">
+            <a:noAutofit/>
           </a:bodyPr>
           <a:lstStyle/>
           <a:p>
             <a:pPr algn="l"/>
             <a:r>
-              <a:rPr sz="2200" b="1">
+              <a:rPr sz="2000" b="1" i="0">
                 <a:solidFill>
                   <a:srgbClr val="C0392B"/>
                 </a:solidFill>
@@ -5890,7 +5905,7 @@
           <p:nvPr/>
         </p:nvGraphicFramePr>
         <p:xfrm>
-          <a:off x="457200" y="2286000"/>
+          <a:off x="457200" y="2148840"/>
           <a:ext cx="11277295" cy="2286000"/>
         </p:xfrm>
         <a:graphic>
@@ -6376,14 +6391,14 @@
           <a:noFill/>
         </p:spPr>
         <p:txBody>
-          <a:bodyPr wrap="square" lIns="45720" rIns="45720" tIns="18288" bIns="18288">
-            <a:spAutoFit/>
+          <a:bodyPr wrap="square" anchor="ctr" lIns="0" rIns="0" tIns="0" bIns="0">
+            <a:noAutofit/>
           </a:bodyPr>
           <a:lstStyle/>
           <a:p>
             <a:pPr algn="l"/>
             <a:r>
-              <a:rPr sz="1100" b="0">
+              <a:rPr sz="1100" b="0" i="1">
                 <a:solidFill>
                   <a:srgbClr val="808080"/>
                 </a:solidFill>
@@ -6419,8 +6434,8 @@
         </p:nvSpPr>
         <p:spPr>
           <a:xfrm>
-            <a:off x="457200" y="457200"/>
-            <a:ext cx="11277295" cy="822960"/>
+            <a:off x="457200" y="365760"/>
+            <a:ext cx="11277295" cy="914400"/>
           </a:xfrm>
           <a:prstGeom prst="rect">
             <a:avLst/>
@@ -6428,14 +6443,14 @@
           <a:noFill/>
         </p:spPr>
         <p:txBody>
-          <a:bodyPr wrap="square" lIns="45720" rIns="45720" tIns="18288" bIns="18288">
-            <a:spAutoFit/>
+          <a:bodyPr wrap="square" anchor="ctr" lIns="0" rIns="0" tIns="0" bIns="0">
+            <a:noAutofit/>
           </a:bodyPr>
           <a:lstStyle/>
           <a:p>
             <a:pPr algn="l"/>
             <a:r>
-              <a:rPr sz="3000" b="1">
+              <a:rPr sz="2800" b="1" i="0">
                 <a:solidFill>
                   <a:srgbClr val="1F4E78"/>
                 </a:solidFill>
@@ -6453,8 +6468,8 @@
         </p:nvSpPr>
         <p:spPr>
           <a:xfrm>
-            <a:off x="457200" y="1234440"/>
-            <a:ext cx="1828800" cy="36576"/>
+            <a:off x="457200" y="1298448"/>
+            <a:ext cx="2194560" cy="36576"/>
           </a:xfrm>
           <a:prstGeom prst="rect">
             <a:avLst/>
@@ -6496,8 +6511,8 @@
         </p:nvSpPr>
         <p:spPr>
           <a:xfrm>
-            <a:off x="457200" y="1463040"/>
-            <a:ext cx="11277295" cy="640080"/>
+            <a:off x="457200" y="1508760"/>
+            <a:ext cx="11277295" cy="502920"/>
           </a:xfrm>
           <a:prstGeom prst="rect">
             <a:avLst/>
@@ -6505,14 +6520,14 @@
           <a:noFill/>
         </p:spPr>
         <p:txBody>
-          <a:bodyPr wrap="square" lIns="45720" rIns="45720" tIns="18288" bIns="18288">
-            <a:spAutoFit/>
+          <a:bodyPr wrap="square" anchor="ctr" lIns="0" rIns="0" tIns="0" bIns="0">
+            <a:noAutofit/>
           </a:bodyPr>
           <a:lstStyle/>
           <a:p>
             <a:pPr algn="l"/>
             <a:r>
-              <a:rPr sz="2200" b="1">
+              <a:rPr sz="2000" b="1" i="0">
                 <a:solidFill>
                   <a:srgbClr val="C0392B"/>
                 </a:solidFill>
@@ -6530,8 +6545,8 @@
         </p:nvSpPr>
         <p:spPr>
           <a:xfrm>
-            <a:off x="640080" y="2286000"/>
-            <a:ext cx="10911535" cy="4069080"/>
+            <a:off x="640080" y="2148840"/>
+            <a:ext cx="10911535" cy="4114800"/>
           </a:xfrm>
           <a:prstGeom prst="rect">
             <a:avLst/>
@@ -6539,15 +6554,18 @@
           <a:noFill/>
         </p:spPr>
         <p:txBody>
-          <a:bodyPr wrap="square" lIns="45720" rIns="45720">
-            <a:spAutoFit/>
+          <a:bodyPr wrap="square" anchor="t" lIns="0" rIns="0" tIns="0" bIns="0">
+            <a:noAutofit/>
           </a:bodyPr>
           <a:lstStyle/>
           <a:p>
             <a:pPr algn="l">
               <a:lnSpc>
-                <a:spcPct val="130000"/>
+                <a:spcPct val="135000"/>
               </a:lnSpc>
+              <a:spcAft>
+                <a:spcPts val="600"/>
+              </a:spcAft>
             </a:pPr>
             <a:r>
               <a:rPr sz="1800">
@@ -6561,8 +6579,11 @@
           <a:p>
             <a:pPr algn="l">
               <a:lnSpc>
-                <a:spcPct val="130000"/>
+                <a:spcPct val="135000"/>
               </a:lnSpc>
+              <a:spcAft>
+                <a:spcPts val="600"/>
+              </a:spcAft>
             </a:pPr>
             <a:r>
               <a:rPr sz="1800">
@@ -6576,8 +6597,11 @@
           <a:p>
             <a:pPr algn="l">
               <a:lnSpc>
-                <a:spcPct val="130000"/>
+                <a:spcPct val="135000"/>
               </a:lnSpc>
+              <a:spcAft>
+                <a:spcPts val="600"/>
+              </a:spcAft>
             </a:pPr>
             <a:r>
               <a:rPr sz="1800">
@@ -6591,8 +6615,11 @@
           <a:p>
             <a:pPr algn="l">
               <a:lnSpc>
-                <a:spcPct val="130000"/>
+                <a:spcPct val="135000"/>
               </a:lnSpc>
+              <a:spcAft>
+                <a:spcPts val="600"/>
+              </a:spcAft>
             </a:pPr>
             <a:r>
               <a:rPr sz="1800">
@@ -6606,8 +6633,11 @@
           <a:p>
             <a:pPr algn="l">
               <a:lnSpc>
-                <a:spcPct val="130000"/>
+                <a:spcPct val="135000"/>
               </a:lnSpc>
+              <a:spcAft>
+                <a:spcPts val="600"/>
+              </a:spcAft>
             </a:pPr>
             <a:r>
               <a:rPr sz="1800">
@@ -6637,14 +6667,14 @@
           <a:noFill/>
         </p:spPr>
         <p:txBody>
-          <a:bodyPr wrap="square" lIns="45720" rIns="45720" tIns="18288" bIns="18288">
-            <a:spAutoFit/>
+          <a:bodyPr wrap="square" anchor="ctr" lIns="0" rIns="0" tIns="0" bIns="0">
+            <a:noAutofit/>
           </a:bodyPr>
           <a:lstStyle/>
           <a:p>
             <a:pPr algn="l"/>
             <a:r>
-              <a:rPr sz="1100" b="0">
+              <a:rPr sz="1100" b="0" i="1">
                 <a:solidFill>
                   <a:srgbClr val="808080"/>
                 </a:solidFill>
@@ -6680,8 +6710,8 @@
         </p:nvSpPr>
         <p:spPr>
           <a:xfrm>
-            <a:off x="457200" y="457200"/>
-            <a:ext cx="11277295" cy="822960"/>
+            <a:off x="457200" y="365760"/>
+            <a:ext cx="11277295" cy="914400"/>
           </a:xfrm>
           <a:prstGeom prst="rect">
             <a:avLst/>
@@ -6689,14 +6719,14 @@
           <a:noFill/>
         </p:spPr>
         <p:txBody>
-          <a:bodyPr wrap="square" lIns="45720" rIns="45720" tIns="18288" bIns="18288">
-            <a:spAutoFit/>
+          <a:bodyPr wrap="square" anchor="ctr" lIns="0" rIns="0" tIns="0" bIns="0">
+            <a:noAutofit/>
           </a:bodyPr>
           <a:lstStyle/>
           <a:p>
             <a:pPr algn="l"/>
             <a:r>
-              <a:rPr sz="3000" b="1">
+              <a:rPr sz="2800" b="1" i="0">
                 <a:solidFill>
                   <a:srgbClr val="1F4E78"/>
                 </a:solidFill>
@@ -6714,8 +6744,8 @@
         </p:nvSpPr>
         <p:spPr>
           <a:xfrm>
-            <a:off x="457200" y="1234440"/>
-            <a:ext cx="1828800" cy="36576"/>
+            <a:off x="457200" y="1298448"/>
+            <a:ext cx="2194560" cy="36576"/>
           </a:xfrm>
           <a:prstGeom prst="rect">
             <a:avLst/>
@@ -6757,8 +6787,8 @@
         </p:nvSpPr>
         <p:spPr>
           <a:xfrm>
-            <a:off x="457200" y="1463040"/>
-            <a:ext cx="11277295" cy="640080"/>
+            <a:off x="457200" y="1508760"/>
+            <a:ext cx="11277295" cy="502920"/>
           </a:xfrm>
           <a:prstGeom prst="rect">
             <a:avLst/>
@@ -6766,14 +6796,14 @@
           <a:noFill/>
         </p:spPr>
         <p:txBody>
-          <a:bodyPr wrap="square" lIns="45720" rIns="45720" tIns="18288" bIns="18288">
-            <a:spAutoFit/>
+          <a:bodyPr wrap="square" anchor="ctr" lIns="0" rIns="0" tIns="0" bIns="0">
+            <a:noAutofit/>
           </a:bodyPr>
           <a:lstStyle/>
           <a:p>
             <a:pPr algn="l"/>
             <a:r>
-              <a:rPr sz="2200" b="1">
+              <a:rPr sz="2000" b="1" i="0">
                 <a:solidFill>
                   <a:srgbClr val="C0392B"/>
                 </a:solidFill>
@@ -6791,8 +6821,8 @@
         </p:nvSpPr>
         <p:spPr>
           <a:xfrm>
-            <a:off x="640080" y="2286000"/>
-            <a:ext cx="10911535" cy="4069080"/>
+            <a:off x="640080" y="2148840"/>
+            <a:ext cx="10911535" cy="4114800"/>
           </a:xfrm>
           <a:prstGeom prst="rect">
             <a:avLst/>
@@ -6800,15 +6830,18 @@
           <a:noFill/>
         </p:spPr>
         <p:txBody>
-          <a:bodyPr wrap="square" lIns="45720" rIns="45720">
-            <a:spAutoFit/>
+          <a:bodyPr wrap="square" anchor="t" lIns="0" rIns="0" tIns="0" bIns="0">
+            <a:noAutofit/>
           </a:bodyPr>
           <a:lstStyle/>
           <a:p>
             <a:pPr algn="l">
               <a:lnSpc>
-                <a:spcPct val="130000"/>
+                <a:spcPct val="135000"/>
               </a:lnSpc>
+              <a:spcAft>
+                <a:spcPts val="600"/>
+              </a:spcAft>
             </a:pPr>
             <a:r>
               <a:rPr sz="1800">
@@ -6822,8 +6855,11 @@
           <a:p>
             <a:pPr algn="l">
               <a:lnSpc>
-                <a:spcPct val="130000"/>
+                <a:spcPct val="135000"/>
               </a:lnSpc>
+              <a:spcAft>
+                <a:spcPts val="600"/>
+              </a:spcAft>
             </a:pPr>
             <a:r>
               <a:rPr sz="1800">
@@ -6837,8 +6873,11 @@
           <a:p>
             <a:pPr algn="l">
               <a:lnSpc>
-                <a:spcPct val="130000"/>
+                <a:spcPct val="135000"/>
               </a:lnSpc>
+              <a:spcAft>
+                <a:spcPts val="600"/>
+              </a:spcAft>
             </a:pPr>
             <a:r>
               <a:rPr sz="1800">
@@ -6852,8 +6891,11 @@
           <a:p>
             <a:pPr algn="l">
               <a:lnSpc>
-                <a:spcPct val="130000"/>
+                <a:spcPct val="135000"/>
               </a:lnSpc>
+              <a:spcAft>
+                <a:spcPts val="600"/>
+              </a:spcAft>
             </a:pPr>
             <a:r>
               <a:rPr sz="1800">
@@ -6867,8 +6909,11 @@
           <a:p>
             <a:pPr algn="l">
               <a:lnSpc>
-                <a:spcPct val="130000"/>
+                <a:spcPct val="135000"/>
               </a:lnSpc>
+              <a:spcAft>
+                <a:spcPts val="600"/>
+              </a:spcAft>
             </a:pPr>
             <a:r>
               <a:rPr sz="1800">
@@ -6907,8 +6952,8 @@
         </p:nvSpPr>
         <p:spPr>
           <a:xfrm>
-            <a:off x="457200" y="457200"/>
-            <a:ext cx="11277295" cy="822960"/>
+            <a:off x="457200" y="365760"/>
+            <a:ext cx="11277295" cy="914400"/>
           </a:xfrm>
           <a:prstGeom prst="rect">
             <a:avLst/>
@@ -6916,14 +6961,14 @@
           <a:noFill/>
         </p:spPr>
         <p:txBody>
-          <a:bodyPr wrap="square" lIns="45720" rIns="45720" tIns="18288" bIns="18288">
-            <a:spAutoFit/>
+          <a:bodyPr wrap="square" anchor="ctr" lIns="0" rIns="0" tIns="0" bIns="0">
+            <a:noAutofit/>
           </a:bodyPr>
           <a:lstStyle/>
           <a:p>
             <a:pPr algn="l"/>
             <a:r>
-              <a:rPr sz="3000" b="1">
+              <a:rPr sz="2800" b="1" i="0">
                 <a:solidFill>
                   <a:srgbClr val="1F4E78"/>
                 </a:solidFill>
@@ -6941,8 +6986,8 @@
         </p:nvSpPr>
         <p:spPr>
           <a:xfrm>
-            <a:off x="457200" y="1234440"/>
-            <a:ext cx="1828800" cy="36576"/>
+            <a:off x="457200" y="1298448"/>
+            <a:ext cx="2194560" cy="36576"/>
           </a:xfrm>
           <a:prstGeom prst="rect">
             <a:avLst/>
@@ -6984,8 +7029,8 @@
         </p:nvSpPr>
         <p:spPr>
           <a:xfrm>
-            <a:off x="822960" y="1463040"/>
-            <a:ext cx="10545775" cy="4892040"/>
+            <a:off x="822960" y="2148840"/>
+            <a:ext cx="10545775" cy="4114800"/>
           </a:xfrm>
           <a:prstGeom prst="rect">
             <a:avLst/>
@@ -6993,15 +7038,18 @@
           <a:noFill/>
         </p:spPr>
         <p:txBody>
-          <a:bodyPr wrap="square" lIns="45720" rIns="45720">
-            <a:spAutoFit/>
+          <a:bodyPr wrap="square" anchor="t" lIns="0" rIns="0" tIns="0" bIns="0">
+            <a:noAutofit/>
           </a:bodyPr>
           <a:lstStyle/>
           <a:p>
             <a:pPr algn="l">
               <a:lnSpc>
-                <a:spcPct val="130000"/>
+                <a:spcPct val="135000"/>
               </a:lnSpc>
+              <a:spcAft>
+                <a:spcPts val="600"/>
+              </a:spcAft>
             </a:pPr>
             <a:r>
               <a:rPr sz="2200">
@@ -7092,14 +7140,14 @@
           <a:noFill/>
         </p:spPr>
         <p:txBody>
-          <a:bodyPr wrap="square" lIns="45720" rIns="45720" tIns="18288" bIns="18288">
-            <a:spAutoFit/>
+          <a:bodyPr wrap="square" anchor="ctr" lIns="0" rIns="0" tIns="0" bIns="0">
+            <a:noAutofit/>
           </a:bodyPr>
           <a:lstStyle/>
           <a:p>
             <a:pPr algn="ctr"/>
             <a:r>
-              <a:rPr sz="5800" b="1">
+              <a:rPr sz="5800" b="1" i="0">
                 <a:solidFill>
                   <a:srgbClr val="FFFFFF"/>
                 </a:solidFill>
@@ -7135,8 +7183,8 @@
         </p:nvSpPr>
         <p:spPr>
           <a:xfrm>
-            <a:off x="457200" y="457200"/>
-            <a:ext cx="11277295" cy="822960"/>
+            <a:off x="457200" y="365760"/>
+            <a:ext cx="11277295" cy="914400"/>
           </a:xfrm>
           <a:prstGeom prst="rect">
             <a:avLst/>
@@ -7144,14 +7192,14 @@
           <a:noFill/>
         </p:spPr>
         <p:txBody>
-          <a:bodyPr wrap="square" lIns="45720" rIns="45720" tIns="18288" bIns="18288">
-            <a:spAutoFit/>
+          <a:bodyPr wrap="square" anchor="ctr" lIns="0" rIns="0" tIns="0" bIns="0">
+            <a:noAutofit/>
           </a:bodyPr>
           <a:lstStyle/>
           <a:p>
             <a:pPr algn="l"/>
             <a:r>
-              <a:rPr sz="3000" b="1">
+              <a:rPr sz="2800" b="1" i="0">
                 <a:solidFill>
                   <a:srgbClr val="1F4E78"/>
                 </a:solidFill>
@@ -7169,8 +7217,8 @@
         </p:nvSpPr>
         <p:spPr>
           <a:xfrm>
-            <a:off x="457200" y="1234440"/>
-            <a:ext cx="1828800" cy="36576"/>
+            <a:off x="457200" y="1298448"/>
+            <a:ext cx="2194560" cy="36576"/>
           </a:xfrm>
           <a:prstGeom prst="rect">
             <a:avLst/>
@@ -7212,8 +7260,8 @@
         </p:nvSpPr>
         <p:spPr>
           <a:xfrm>
-            <a:off x="457200" y="1463040"/>
-            <a:ext cx="11277295" cy="640080"/>
+            <a:off x="457200" y="1508760"/>
+            <a:ext cx="11277295" cy="502920"/>
           </a:xfrm>
           <a:prstGeom prst="rect">
             <a:avLst/>
@@ -7221,14 +7269,14 @@
           <a:noFill/>
         </p:spPr>
         <p:txBody>
-          <a:bodyPr wrap="square" lIns="45720" rIns="45720" tIns="18288" bIns="18288">
-            <a:spAutoFit/>
+          <a:bodyPr wrap="square" anchor="ctr" lIns="0" rIns="0" tIns="0" bIns="0">
+            <a:noAutofit/>
           </a:bodyPr>
           <a:lstStyle/>
           <a:p>
             <a:pPr algn="l"/>
             <a:r>
-              <a:rPr sz="2200" b="1">
+              <a:rPr sz="2000" b="1" i="0">
                 <a:solidFill>
                   <a:srgbClr val="C0392B"/>
                 </a:solidFill>
@@ -7246,8 +7294,8 @@
         </p:nvSpPr>
         <p:spPr>
           <a:xfrm>
-            <a:off x="640080" y="2286000"/>
-            <a:ext cx="10911535" cy="4069080"/>
+            <a:off x="640080" y="2148840"/>
+            <a:ext cx="10911535" cy="4114800"/>
           </a:xfrm>
           <a:prstGeom prst="rect">
             <a:avLst/>
@@ -7255,15 +7303,18 @@
           <a:noFill/>
         </p:spPr>
         <p:txBody>
-          <a:bodyPr wrap="square" lIns="45720" rIns="45720">
-            <a:spAutoFit/>
+          <a:bodyPr wrap="square" anchor="t" lIns="0" rIns="0" tIns="0" bIns="0">
+            <a:noAutofit/>
           </a:bodyPr>
           <a:lstStyle/>
           <a:p>
             <a:pPr algn="l">
               <a:lnSpc>
-                <a:spcPct val="130000"/>
+                <a:spcPct val="135000"/>
               </a:lnSpc>
+              <a:spcAft>
+                <a:spcPts val="600"/>
+              </a:spcAft>
             </a:pPr>
             <a:r>
               <a:rPr sz="1800">
@@ -7277,8 +7328,11 @@
           <a:p>
             <a:pPr algn="l">
               <a:lnSpc>
-                <a:spcPct val="130000"/>
+                <a:spcPct val="135000"/>
               </a:lnSpc>
+              <a:spcAft>
+                <a:spcPts val="600"/>
+              </a:spcAft>
             </a:pPr>
             <a:r>
               <a:rPr sz="1800">
@@ -7292,8 +7346,11 @@
           <a:p>
             <a:pPr algn="l">
               <a:lnSpc>
-                <a:spcPct val="130000"/>
+                <a:spcPct val="135000"/>
               </a:lnSpc>
+              <a:spcAft>
+                <a:spcPts val="600"/>
+              </a:spcAft>
             </a:pPr>
             <a:r>
               <a:rPr sz="1800">
@@ -7323,14 +7380,14 @@
           <a:noFill/>
         </p:spPr>
         <p:txBody>
-          <a:bodyPr wrap="square" lIns="45720" rIns="45720" tIns="18288" bIns="18288">
-            <a:spAutoFit/>
+          <a:bodyPr wrap="square" anchor="ctr" lIns="0" rIns="0" tIns="0" bIns="0">
+            <a:noAutofit/>
           </a:bodyPr>
           <a:lstStyle/>
           <a:p>
             <a:pPr algn="l"/>
             <a:r>
-              <a:rPr sz="1100" b="0">
+              <a:rPr sz="1100" b="0" i="1">
                 <a:solidFill>
                   <a:srgbClr val="808080"/>
                 </a:solidFill>
@@ -7366,8 +7423,8 @@
         </p:nvSpPr>
         <p:spPr>
           <a:xfrm>
-            <a:off x="457200" y="457200"/>
-            <a:ext cx="11277295" cy="822960"/>
+            <a:off x="457200" y="365760"/>
+            <a:ext cx="11277295" cy="914400"/>
           </a:xfrm>
           <a:prstGeom prst="rect">
             <a:avLst/>
@@ -7375,14 +7432,14 @@
           <a:noFill/>
         </p:spPr>
         <p:txBody>
-          <a:bodyPr wrap="square" lIns="45720" rIns="45720" tIns="18288" bIns="18288">
-            <a:spAutoFit/>
+          <a:bodyPr wrap="square" anchor="ctr" lIns="0" rIns="0" tIns="0" bIns="0">
+            <a:noAutofit/>
           </a:bodyPr>
           <a:lstStyle/>
           <a:p>
             <a:pPr algn="l"/>
             <a:r>
-              <a:rPr sz="3000" b="1">
+              <a:rPr sz="2800" b="1" i="0">
                 <a:solidFill>
                   <a:srgbClr val="1F4E78"/>
                 </a:solidFill>
@@ -7400,8 +7457,8 @@
         </p:nvSpPr>
         <p:spPr>
           <a:xfrm>
-            <a:off x="457200" y="1234440"/>
-            <a:ext cx="1828800" cy="36576"/>
+            <a:off x="457200" y="1298448"/>
+            <a:ext cx="2194560" cy="36576"/>
           </a:xfrm>
           <a:prstGeom prst="rect">
             <a:avLst/>
@@ -7443,8 +7500,8 @@
         </p:nvSpPr>
         <p:spPr>
           <a:xfrm>
-            <a:off x="457200" y="1463040"/>
-            <a:ext cx="11277295" cy="640080"/>
+            <a:off x="457200" y="1508760"/>
+            <a:ext cx="11277295" cy="502920"/>
           </a:xfrm>
           <a:prstGeom prst="rect">
             <a:avLst/>
@@ -7452,14 +7509,14 @@
           <a:noFill/>
         </p:spPr>
         <p:txBody>
-          <a:bodyPr wrap="square" lIns="45720" rIns="45720" tIns="18288" bIns="18288">
-            <a:spAutoFit/>
+          <a:bodyPr wrap="square" anchor="ctr" lIns="0" rIns="0" tIns="0" bIns="0">
+            <a:noAutofit/>
           </a:bodyPr>
           <a:lstStyle/>
           <a:p>
             <a:pPr algn="l"/>
             <a:r>
-              <a:rPr sz="2200" b="1">
+              <a:rPr sz="2000" b="1" i="0">
                 <a:solidFill>
                   <a:srgbClr val="C0392B"/>
                 </a:solidFill>
@@ -7478,7 +7535,7 @@
           <p:nvPr/>
         </p:nvGraphicFramePr>
         <p:xfrm>
-          <a:off x="457200" y="2286000"/>
+          <a:off x="457200" y="2148840"/>
           <a:ext cx="11277295" cy="1371600"/>
         </p:xfrm>
         <a:graphic>
@@ -7650,14 +7707,14 @@
           <a:noFill/>
         </p:spPr>
         <p:txBody>
-          <a:bodyPr wrap="square" lIns="45720" rIns="45720" tIns="18288" bIns="18288">
-            <a:spAutoFit/>
+          <a:bodyPr wrap="square" anchor="ctr" lIns="0" rIns="0" tIns="0" bIns="0">
+            <a:noAutofit/>
           </a:bodyPr>
           <a:lstStyle/>
           <a:p>
             <a:pPr algn="l"/>
             <a:r>
-              <a:rPr sz="1100" b="0">
+              <a:rPr sz="1100" b="0" i="1">
                 <a:solidFill>
                   <a:srgbClr val="808080"/>
                 </a:solidFill>
@@ -7693,8 +7750,8 @@
         </p:nvSpPr>
         <p:spPr>
           <a:xfrm>
-            <a:off x="457200" y="457200"/>
-            <a:ext cx="11277295" cy="822960"/>
+            <a:off x="457200" y="365760"/>
+            <a:ext cx="11277295" cy="914400"/>
           </a:xfrm>
           <a:prstGeom prst="rect">
             <a:avLst/>
@@ -7702,14 +7759,14 @@
           <a:noFill/>
         </p:spPr>
         <p:txBody>
-          <a:bodyPr wrap="square" lIns="45720" rIns="45720" tIns="18288" bIns="18288">
-            <a:spAutoFit/>
+          <a:bodyPr wrap="square" anchor="ctr" lIns="0" rIns="0" tIns="0" bIns="0">
+            <a:noAutofit/>
           </a:bodyPr>
           <a:lstStyle/>
           <a:p>
             <a:pPr algn="l"/>
             <a:r>
-              <a:rPr sz="3000" b="1">
+              <a:rPr sz="2800" b="1" i="0">
                 <a:solidFill>
                   <a:srgbClr val="1F4E78"/>
                 </a:solidFill>
@@ -7727,8 +7784,8 @@
         </p:nvSpPr>
         <p:spPr>
           <a:xfrm>
-            <a:off x="457200" y="1234440"/>
-            <a:ext cx="1828800" cy="36576"/>
+            <a:off x="457200" y="1298448"/>
+            <a:ext cx="2194560" cy="36576"/>
           </a:xfrm>
           <a:prstGeom prst="rect">
             <a:avLst/>
@@ -7770,8 +7827,8 @@
         </p:nvSpPr>
         <p:spPr>
           <a:xfrm>
-            <a:off x="457200" y="1463040"/>
-            <a:ext cx="11277295" cy="640080"/>
+            <a:off x="457200" y="1508760"/>
+            <a:ext cx="11277295" cy="502920"/>
           </a:xfrm>
           <a:prstGeom prst="rect">
             <a:avLst/>
@@ -7779,14 +7836,14 @@
           <a:noFill/>
         </p:spPr>
         <p:txBody>
-          <a:bodyPr wrap="square" lIns="45720" rIns="45720" tIns="18288" bIns="18288">
-            <a:spAutoFit/>
+          <a:bodyPr wrap="square" anchor="ctr" lIns="0" rIns="0" tIns="0" bIns="0">
+            <a:noAutofit/>
           </a:bodyPr>
           <a:lstStyle/>
           <a:p>
             <a:pPr algn="l"/>
             <a:r>
-              <a:rPr sz="2200" b="1">
+              <a:rPr sz="2000" b="1" i="0">
                 <a:solidFill>
                   <a:srgbClr val="C0392B"/>
                 </a:solidFill>
@@ -7805,7 +7862,7 @@
           <p:nvPr/>
         </p:nvGraphicFramePr>
         <p:xfrm>
-          <a:off x="457200" y="2286000"/>
+          <a:off x="457200" y="2148840"/>
           <a:ext cx="11277295" cy="2286000"/>
         </p:xfrm>
         <a:graphic>
@@ -8291,14 +8348,14 @@
           <a:noFill/>
         </p:spPr>
         <p:txBody>
-          <a:bodyPr wrap="square" lIns="45720" rIns="45720" tIns="18288" bIns="18288">
-            <a:spAutoFit/>
+          <a:bodyPr wrap="square" anchor="ctr" lIns="0" rIns="0" tIns="0" bIns="0">
+            <a:noAutofit/>
           </a:bodyPr>
           <a:lstStyle/>
           <a:p>
             <a:pPr algn="l"/>
             <a:r>
-              <a:rPr sz="1100" b="0">
+              <a:rPr sz="1100" b="0" i="1">
                 <a:solidFill>
                   <a:srgbClr val="808080"/>
                 </a:solidFill>
@@ -8334,8 +8391,8 @@
         </p:nvSpPr>
         <p:spPr>
           <a:xfrm>
-            <a:off x="457200" y="457200"/>
-            <a:ext cx="11277295" cy="822960"/>
+            <a:off x="457200" y="365760"/>
+            <a:ext cx="11277295" cy="914400"/>
           </a:xfrm>
           <a:prstGeom prst="rect">
             <a:avLst/>
@@ -8343,14 +8400,14 @@
           <a:noFill/>
         </p:spPr>
         <p:txBody>
-          <a:bodyPr wrap="square" lIns="45720" rIns="45720" tIns="18288" bIns="18288">
-            <a:spAutoFit/>
+          <a:bodyPr wrap="square" anchor="ctr" lIns="0" rIns="0" tIns="0" bIns="0">
+            <a:noAutofit/>
           </a:bodyPr>
           <a:lstStyle/>
           <a:p>
             <a:pPr algn="l"/>
             <a:r>
-              <a:rPr sz="3000" b="1">
+              <a:rPr sz="2800" b="1" i="0">
                 <a:solidFill>
                   <a:srgbClr val="1F4E78"/>
                 </a:solidFill>
@@ -8368,8 +8425,8 @@
         </p:nvSpPr>
         <p:spPr>
           <a:xfrm>
-            <a:off x="457200" y="1234440"/>
-            <a:ext cx="1828800" cy="36576"/>
+            <a:off x="457200" y="1298448"/>
+            <a:ext cx="2194560" cy="36576"/>
           </a:xfrm>
           <a:prstGeom prst="rect">
             <a:avLst/>
@@ -8411,8 +8468,8 @@
         </p:nvSpPr>
         <p:spPr>
           <a:xfrm>
-            <a:off x="822960" y="1463040"/>
-            <a:ext cx="10545775" cy="4892040"/>
+            <a:off x="822960" y="2148840"/>
+            <a:ext cx="10545775" cy="4114800"/>
           </a:xfrm>
           <a:prstGeom prst="rect">
             <a:avLst/>
@@ -8420,15 +8477,18 @@
           <a:noFill/>
         </p:spPr>
         <p:txBody>
-          <a:bodyPr wrap="square" lIns="45720" rIns="45720">
-            <a:spAutoFit/>
+          <a:bodyPr wrap="square" anchor="t" lIns="0" rIns="0" tIns="0" bIns="0">
+            <a:noAutofit/>
           </a:bodyPr>
           <a:lstStyle/>
           <a:p>
             <a:pPr algn="l">
               <a:lnSpc>
-                <a:spcPct val="130000"/>
+                <a:spcPct val="135000"/>
               </a:lnSpc>
+              <a:spcAft>
+                <a:spcPts val="600"/>
+              </a:spcAft>
             </a:pPr>
             <a:r>
               <a:rPr sz="2200">
@@ -8519,14 +8579,14 @@
           <a:noFill/>
         </p:spPr>
         <p:txBody>
-          <a:bodyPr wrap="square" lIns="45720" rIns="45720" tIns="18288" bIns="18288">
-            <a:spAutoFit/>
+          <a:bodyPr wrap="square" anchor="ctr" lIns="0" rIns="0" tIns="0" bIns="0">
+            <a:noAutofit/>
           </a:bodyPr>
           <a:lstStyle/>
           <a:p>
             <a:pPr algn="ctr"/>
             <a:r>
-              <a:rPr sz="5800" b="1">
+              <a:rPr sz="5800" b="1" i="0">
                 <a:solidFill>
                   <a:srgbClr val="FFFFFF"/>
                 </a:solidFill>
@@ -8562,8 +8622,8 @@
         </p:nvSpPr>
         <p:spPr>
           <a:xfrm>
-            <a:off x="457200" y="457200"/>
-            <a:ext cx="11277295" cy="822960"/>
+            <a:off x="457200" y="365760"/>
+            <a:ext cx="11277295" cy="914400"/>
           </a:xfrm>
           <a:prstGeom prst="rect">
             <a:avLst/>
@@ -8571,14 +8631,14 @@
           <a:noFill/>
         </p:spPr>
         <p:txBody>
-          <a:bodyPr wrap="square" lIns="45720" rIns="45720" tIns="18288" bIns="18288">
-            <a:spAutoFit/>
+          <a:bodyPr wrap="square" anchor="ctr" lIns="0" rIns="0" tIns="0" bIns="0">
+            <a:noAutofit/>
           </a:bodyPr>
           <a:lstStyle/>
           <a:p>
             <a:pPr algn="l"/>
             <a:r>
-              <a:rPr sz="3000" b="1">
+              <a:rPr sz="2800" b="1" i="0">
                 <a:solidFill>
                   <a:srgbClr val="1F4E78"/>
                 </a:solidFill>
@@ -8596,8 +8656,8 @@
         </p:nvSpPr>
         <p:spPr>
           <a:xfrm>
-            <a:off x="457200" y="1234440"/>
-            <a:ext cx="1828800" cy="36576"/>
+            <a:off x="457200" y="1298448"/>
+            <a:ext cx="2194560" cy="36576"/>
           </a:xfrm>
           <a:prstGeom prst="rect">
             <a:avLst/>
@@ -8639,8 +8699,8 @@
         </p:nvSpPr>
         <p:spPr>
           <a:xfrm>
-            <a:off x="457200" y="1463040"/>
-            <a:ext cx="11277295" cy="640080"/>
+            <a:off x="457200" y="1508760"/>
+            <a:ext cx="11277295" cy="502920"/>
           </a:xfrm>
           <a:prstGeom prst="rect">
             <a:avLst/>
@@ -8648,14 +8708,14 @@
           <a:noFill/>
         </p:spPr>
         <p:txBody>
-          <a:bodyPr wrap="square" lIns="45720" rIns="45720" tIns="18288" bIns="18288">
-            <a:spAutoFit/>
+          <a:bodyPr wrap="square" anchor="ctr" lIns="0" rIns="0" tIns="0" bIns="0">
+            <a:noAutofit/>
           </a:bodyPr>
           <a:lstStyle/>
           <a:p>
             <a:pPr algn="l"/>
             <a:r>
-              <a:rPr sz="2200" b="1">
+              <a:rPr sz="2000" b="1" i="0">
                 <a:solidFill>
                   <a:srgbClr val="C0392B"/>
                 </a:solidFill>
@@ -8674,7 +8734,7 @@
           <p:nvPr/>
         </p:nvGraphicFramePr>
         <p:xfrm>
-          <a:off x="457200" y="2286000"/>
+          <a:off x="457200" y="2148840"/>
           <a:ext cx="11277295" cy="2286000"/>
         </p:xfrm>
         <a:graphic>
@@ -9160,14 +9220,14 @@
           <a:noFill/>
         </p:spPr>
         <p:txBody>
-          <a:bodyPr wrap="square" lIns="45720" rIns="45720" tIns="18288" bIns="18288">
-            <a:spAutoFit/>
+          <a:bodyPr wrap="square" anchor="ctr" lIns="0" rIns="0" tIns="0" bIns="0">
+            <a:noAutofit/>
           </a:bodyPr>
           <a:lstStyle/>
           <a:p>
             <a:pPr algn="l"/>
             <a:r>
-              <a:rPr sz="1100" b="0">
+              <a:rPr sz="1100" b="0" i="1">
                 <a:solidFill>
                   <a:srgbClr val="808080"/>
                 </a:solidFill>
@@ -9203,8 +9263,8 @@
         </p:nvSpPr>
         <p:spPr>
           <a:xfrm>
-            <a:off x="457200" y="457200"/>
-            <a:ext cx="11277295" cy="822960"/>
+            <a:off x="457200" y="365760"/>
+            <a:ext cx="11277295" cy="914400"/>
           </a:xfrm>
           <a:prstGeom prst="rect">
             <a:avLst/>
@@ -9212,14 +9272,14 @@
           <a:noFill/>
         </p:spPr>
         <p:txBody>
-          <a:bodyPr wrap="square" lIns="45720" rIns="45720" tIns="18288" bIns="18288">
-            <a:spAutoFit/>
+          <a:bodyPr wrap="square" anchor="ctr" lIns="0" rIns="0" tIns="0" bIns="0">
+            <a:noAutofit/>
           </a:bodyPr>
           <a:lstStyle/>
           <a:p>
             <a:pPr algn="l"/>
             <a:r>
-              <a:rPr sz="3000" b="1">
+              <a:rPr sz="2800" b="1" i="0">
                 <a:solidFill>
                   <a:srgbClr val="1F4E78"/>
                 </a:solidFill>
@@ -9237,8 +9297,8 @@
         </p:nvSpPr>
         <p:spPr>
           <a:xfrm>
-            <a:off x="457200" y="1234440"/>
-            <a:ext cx="1828800" cy="36576"/>
+            <a:off x="457200" y="1298448"/>
+            <a:ext cx="2194560" cy="36576"/>
           </a:xfrm>
           <a:prstGeom prst="rect">
             <a:avLst/>
@@ -9280,8 +9340,8 @@
         </p:nvSpPr>
         <p:spPr>
           <a:xfrm>
-            <a:off x="457200" y="1463040"/>
-            <a:ext cx="11277295" cy="640080"/>
+            <a:off x="457200" y="1508760"/>
+            <a:ext cx="11277295" cy="502920"/>
           </a:xfrm>
           <a:prstGeom prst="rect">
             <a:avLst/>
@@ -9289,14 +9349,14 @@
           <a:noFill/>
         </p:spPr>
         <p:txBody>
-          <a:bodyPr wrap="square" lIns="45720" rIns="45720" tIns="18288" bIns="18288">
-            <a:spAutoFit/>
+          <a:bodyPr wrap="square" anchor="ctr" lIns="0" rIns="0" tIns="0" bIns="0">
+            <a:noAutofit/>
           </a:bodyPr>
           <a:lstStyle/>
           <a:p>
             <a:pPr algn="l"/>
             <a:r>
-              <a:rPr sz="2200" b="1">
+              <a:rPr sz="2000" b="1" i="0">
                 <a:solidFill>
                   <a:srgbClr val="C0392B"/>
                 </a:solidFill>
@@ -9314,8 +9374,8 @@
         </p:nvSpPr>
         <p:spPr>
           <a:xfrm>
-            <a:off x="640080" y="2286000"/>
-            <a:ext cx="10911535" cy="4069080"/>
+            <a:off x="640080" y="2148840"/>
+            <a:ext cx="10911535" cy="4114800"/>
           </a:xfrm>
           <a:prstGeom prst="rect">
             <a:avLst/>
@@ -9323,15 +9383,18 @@
           <a:noFill/>
         </p:spPr>
         <p:txBody>
-          <a:bodyPr wrap="square" lIns="45720" rIns="45720">
-            <a:spAutoFit/>
+          <a:bodyPr wrap="square" anchor="t" lIns="0" rIns="0" tIns="0" bIns="0">
+            <a:noAutofit/>
           </a:bodyPr>
           <a:lstStyle/>
           <a:p>
             <a:pPr algn="l">
               <a:lnSpc>
-                <a:spcPct val="130000"/>
+                <a:spcPct val="135000"/>
               </a:lnSpc>
+              <a:spcAft>
+                <a:spcPts val="600"/>
+              </a:spcAft>
             </a:pPr>
             <a:r>
               <a:rPr sz="1800">
@@ -9345,8 +9408,11 @@
           <a:p>
             <a:pPr algn="l">
               <a:lnSpc>
-                <a:spcPct val="130000"/>
+                <a:spcPct val="135000"/>
               </a:lnSpc>
+              <a:spcAft>
+                <a:spcPts val="600"/>
+              </a:spcAft>
             </a:pPr>
             <a:r>
               <a:rPr sz="1800">
@@ -9360,8 +9426,11 @@
           <a:p>
             <a:pPr algn="l">
               <a:lnSpc>
-                <a:spcPct val="130000"/>
+                <a:spcPct val="135000"/>
               </a:lnSpc>
+              <a:spcAft>
+                <a:spcPts val="600"/>
+              </a:spcAft>
             </a:pPr>
             <a:r>
               <a:rPr sz="1800">
@@ -9400,8 +9469,8 @@
         </p:nvSpPr>
         <p:spPr>
           <a:xfrm>
-            <a:off x="457200" y="457200"/>
-            <a:ext cx="11277295" cy="822960"/>
+            <a:off x="457200" y="365760"/>
+            <a:ext cx="11277295" cy="914400"/>
           </a:xfrm>
           <a:prstGeom prst="rect">
             <a:avLst/>
@@ -9409,14 +9478,14 @@
           <a:noFill/>
         </p:spPr>
         <p:txBody>
-          <a:bodyPr wrap="square" lIns="45720" rIns="45720" tIns="18288" bIns="18288">
-            <a:spAutoFit/>
+          <a:bodyPr wrap="square" anchor="ctr" lIns="0" rIns="0" tIns="0" bIns="0">
+            <a:noAutofit/>
           </a:bodyPr>
           <a:lstStyle/>
           <a:p>
             <a:pPr algn="l"/>
             <a:r>
-              <a:rPr sz="3000" b="1">
+              <a:rPr sz="2800" b="1" i="0">
                 <a:solidFill>
                   <a:srgbClr val="1F4E78"/>
                 </a:solidFill>
@@ -9434,8 +9503,8 @@
         </p:nvSpPr>
         <p:spPr>
           <a:xfrm>
-            <a:off x="457200" y="1234440"/>
-            <a:ext cx="1828800" cy="36576"/>
+            <a:off x="457200" y="1298448"/>
+            <a:ext cx="2194560" cy="36576"/>
           </a:xfrm>
           <a:prstGeom prst="rect">
             <a:avLst/>
@@ -9477,8 +9546,8 @@
         </p:nvSpPr>
         <p:spPr>
           <a:xfrm>
-            <a:off x="457200" y="1463040"/>
-            <a:ext cx="11277295" cy="640080"/>
+            <a:off x="457200" y="1508760"/>
+            <a:ext cx="11277295" cy="502920"/>
           </a:xfrm>
           <a:prstGeom prst="rect">
             <a:avLst/>
@@ -9486,14 +9555,14 @@
           <a:noFill/>
         </p:spPr>
         <p:txBody>
-          <a:bodyPr wrap="square" lIns="45720" rIns="45720" tIns="18288" bIns="18288">
-            <a:spAutoFit/>
+          <a:bodyPr wrap="square" anchor="ctr" lIns="0" rIns="0" tIns="0" bIns="0">
+            <a:noAutofit/>
           </a:bodyPr>
           <a:lstStyle/>
           <a:p>
             <a:pPr algn="l"/>
             <a:r>
-              <a:rPr sz="2200" b="1">
+              <a:rPr sz="2000" b="1" i="0">
                 <a:solidFill>
                   <a:srgbClr val="C0392B"/>
                 </a:solidFill>
@@ -9511,8 +9580,8 @@
         </p:nvSpPr>
         <p:spPr>
           <a:xfrm>
-            <a:off x="731520" y="2286000"/>
-            <a:ext cx="10728655" cy="3977640"/>
+            <a:off x="731520" y="2148840"/>
+            <a:ext cx="10728655" cy="4114800"/>
           </a:xfrm>
           <a:prstGeom prst="rect">
             <a:avLst/>
@@ -9520,8 +9589,8 @@
           <a:noFill/>
         </p:spPr>
         <p:txBody>
-          <a:bodyPr wrap="none" tIns="91440">
-            <a:spAutoFit/>
+          <a:bodyPr wrap="none" anchor="t" tIns="91440">
+            <a:noAutofit/>
           </a:bodyPr>
           <a:lstStyle/>
           <a:p>
@@ -9562,14 +9631,14 @@
           <a:noFill/>
         </p:spPr>
         <p:txBody>
-          <a:bodyPr wrap="square" lIns="45720" rIns="45720" tIns="18288" bIns="18288">
-            <a:spAutoFit/>
+          <a:bodyPr wrap="square" anchor="ctr" lIns="0" rIns="0" tIns="0" bIns="0">
+            <a:noAutofit/>
           </a:bodyPr>
           <a:lstStyle/>
           <a:p>
             <a:pPr algn="l"/>
             <a:r>
-              <a:rPr sz="1100" b="0">
+              <a:rPr sz="1100" b="0" i="1">
                 <a:solidFill>
                   <a:srgbClr val="808080"/>
                 </a:solidFill>
@@ -9605,8 +9674,8 @@
         </p:nvSpPr>
         <p:spPr>
           <a:xfrm>
-            <a:off x="457200" y="457200"/>
-            <a:ext cx="11277295" cy="822960"/>
+            <a:off x="457200" y="365760"/>
+            <a:ext cx="11277295" cy="914400"/>
           </a:xfrm>
           <a:prstGeom prst="rect">
             <a:avLst/>
@@ -9614,14 +9683,14 @@
           <a:noFill/>
         </p:spPr>
         <p:txBody>
-          <a:bodyPr wrap="square" lIns="45720" rIns="45720" tIns="18288" bIns="18288">
-            <a:spAutoFit/>
+          <a:bodyPr wrap="square" anchor="ctr" lIns="0" rIns="0" tIns="0" bIns="0">
+            <a:noAutofit/>
           </a:bodyPr>
           <a:lstStyle/>
           <a:p>
             <a:pPr algn="l"/>
             <a:r>
-              <a:rPr sz="3000" b="1">
+              <a:rPr sz="2800" b="1" i="0">
                 <a:solidFill>
                   <a:srgbClr val="1F4E78"/>
                 </a:solidFill>
@@ -9639,8 +9708,8 @@
         </p:nvSpPr>
         <p:spPr>
           <a:xfrm>
-            <a:off x="457200" y="1234440"/>
-            <a:ext cx="1828800" cy="36576"/>
+            <a:off x="457200" y="1298448"/>
+            <a:ext cx="2194560" cy="36576"/>
           </a:xfrm>
           <a:prstGeom prst="rect">
             <a:avLst/>
@@ -9682,8 +9751,8 @@
         </p:nvSpPr>
         <p:spPr>
           <a:xfrm>
-            <a:off x="457200" y="1463040"/>
-            <a:ext cx="11277295" cy="640080"/>
+            <a:off x="457200" y="1508760"/>
+            <a:ext cx="11277295" cy="502920"/>
           </a:xfrm>
           <a:prstGeom prst="rect">
             <a:avLst/>
@@ -9691,14 +9760,14 @@
           <a:noFill/>
         </p:spPr>
         <p:txBody>
-          <a:bodyPr wrap="square" lIns="45720" rIns="45720" tIns="18288" bIns="18288">
-            <a:spAutoFit/>
+          <a:bodyPr wrap="square" anchor="ctr" lIns="0" rIns="0" tIns="0" bIns="0">
+            <a:noAutofit/>
           </a:bodyPr>
           <a:lstStyle/>
           <a:p>
             <a:pPr algn="l"/>
             <a:r>
-              <a:rPr sz="2200" b="1">
+              <a:rPr sz="2000" b="1" i="0">
                 <a:solidFill>
                   <a:srgbClr val="C0392B"/>
                 </a:solidFill>
@@ -9716,8 +9785,8 @@
         </p:nvSpPr>
         <p:spPr>
           <a:xfrm>
-            <a:off x="1371600" y="2286000"/>
-            <a:ext cx="9448495" cy="3794760"/>
+            <a:off x="1371600" y="2148840"/>
+            <a:ext cx="9448495" cy="3931920"/>
           </a:xfrm>
           <a:prstGeom prst="rect">
             <a:avLst/>
@@ -9746,7 +9815,9 @@
           </a:fontRef>
         </p:style>
         <p:txBody>
-          <a:bodyPr rtlCol="0" anchor="ctr" wrap="square" lIns="274320" rIns="274320" tIns="365760"/>
+          <a:bodyPr rtlCol="0" anchor="ctr" wrap="square" lIns="274320" rIns="274320" tIns="365760">
+            <a:noAutofit/>
+          </a:bodyPr>
           <a:lstStyle/>
           <a:p>
             <a:pPr algn="ctr"/>
@@ -9809,14 +9880,14 @@
           <a:noFill/>
         </p:spPr>
         <p:txBody>
-          <a:bodyPr wrap="square" lIns="45720" rIns="45720" tIns="18288" bIns="18288">
-            <a:spAutoFit/>
+          <a:bodyPr wrap="square" anchor="ctr" lIns="0" rIns="0" tIns="0" bIns="0">
+            <a:noAutofit/>
           </a:bodyPr>
           <a:lstStyle/>
           <a:p>
             <a:pPr algn="l"/>
             <a:r>
-              <a:rPr sz="1100" b="0">
+              <a:rPr sz="1100" b="0" i="1">
                 <a:solidFill>
                   <a:srgbClr val="808080"/>
                 </a:solidFill>
@@ -9852,8 +9923,8 @@
         </p:nvSpPr>
         <p:spPr>
           <a:xfrm>
-            <a:off x="457200" y="457200"/>
-            <a:ext cx="11277295" cy="822960"/>
+            <a:off x="457200" y="365760"/>
+            <a:ext cx="11277295" cy="914400"/>
           </a:xfrm>
           <a:prstGeom prst="rect">
             <a:avLst/>
@@ -9861,14 +9932,14 @@
           <a:noFill/>
         </p:spPr>
         <p:txBody>
-          <a:bodyPr wrap="square" lIns="45720" rIns="45720" tIns="18288" bIns="18288">
-            <a:spAutoFit/>
+          <a:bodyPr wrap="square" anchor="ctr" lIns="0" rIns="0" tIns="0" bIns="0">
+            <a:noAutofit/>
           </a:bodyPr>
           <a:lstStyle/>
           <a:p>
             <a:pPr algn="l"/>
             <a:r>
-              <a:rPr sz="3000" b="1">
+              <a:rPr sz="2800" b="1" i="0">
                 <a:solidFill>
                   <a:srgbClr val="1F4E78"/>
                 </a:solidFill>
@@ -9886,8 +9957,8 @@
         </p:nvSpPr>
         <p:spPr>
           <a:xfrm>
-            <a:off x="457200" y="1234440"/>
-            <a:ext cx="1828800" cy="36576"/>
+            <a:off x="457200" y="1298448"/>
+            <a:ext cx="2194560" cy="36576"/>
           </a:xfrm>
           <a:prstGeom prst="rect">
             <a:avLst/>
@@ -9929,8 +10000,8 @@
         </p:nvSpPr>
         <p:spPr>
           <a:xfrm>
-            <a:off x="822960" y="1463040"/>
-            <a:ext cx="10545775" cy="4892040"/>
+            <a:off x="822960" y="2148840"/>
+            <a:ext cx="10545775" cy="4114800"/>
           </a:xfrm>
           <a:prstGeom prst="rect">
             <a:avLst/>
@@ -9938,15 +10009,18 @@
           <a:noFill/>
         </p:spPr>
         <p:txBody>
-          <a:bodyPr wrap="square" lIns="45720" rIns="45720">
-            <a:spAutoFit/>
+          <a:bodyPr wrap="square" anchor="t" lIns="0" rIns="0" tIns="0" bIns="0">
+            <a:noAutofit/>
           </a:bodyPr>
           <a:lstStyle/>
           <a:p>
             <a:pPr algn="l">
               <a:lnSpc>
-                <a:spcPct val="130000"/>
+                <a:spcPct val="135000"/>
               </a:lnSpc>
+              <a:spcAft>
+                <a:spcPts val="600"/>
+              </a:spcAft>
             </a:pPr>
             <a:r>
               <a:rPr sz="2200">
@@ -10037,14 +10111,14 @@
           <a:noFill/>
         </p:spPr>
         <p:txBody>
-          <a:bodyPr wrap="square" lIns="45720" rIns="45720" tIns="18288" bIns="18288">
-            <a:spAutoFit/>
+          <a:bodyPr wrap="square" anchor="ctr" lIns="0" rIns="0" tIns="0" bIns="0">
+            <a:noAutofit/>
           </a:bodyPr>
           <a:lstStyle/>
           <a:p>
             <a:pPr algn="ctr"/>
             <a:r>
-              <a:rPr sz="5800" b="1">
+              <a:rPr sz="5800" b="1" i="0">
                 <a:solidFill>
                   <a:srgbClr val="FFFFFF"/>
                 </a:solidFill>
@@ -10080,8 +10154,8 @@
         </p:nvSpPr>
         <p:spPr>
           <a:xfrm>
-            <a:off x="457200" y="457200"/>
-            <a:ext cx="11277295" cy="822960"/>
+            <a:off x="457200" y="365760"/>
+            <a:ext cx="11277295" cy="914400"/>
           </a:xfrm>
           <a:prstGeom prst="rect">
             <a:avLst/>
@@ -10089,14 +10163,14 @@
           <a:noFill/>
         </p:spPr>
         <p:txBody>
-          <a:bodyPr wrap="square" lIns="45720" rIns="45720" tIns="18288" bIns="18288">
-            <a:spAutoFit/>
+          <a:bodyPr wrap="square" anchor="ctr" lIns="0" rIns="0" tIns="0" bIns="0">
+            <a:noAutofit/>
           </a:bodyPr>
           <a:lstStyle/>
           <a:p>
             <a:pPr algn="l"/>
             <a:r>
-              <a:rPr sz="3000" b="1">
+              <a:rPr sz="2800" b="1" i="0">
                 <a:solidFill>
                   <a:srgbClr val="1F4E78"/>
                 </a:solidFill>
@@ -10114,8 +10188,8 @@
         </p:nvSpPr>
         <p:spPr>
           <a:xfrm>
-            <a:off x="457200" y="1234440"/>
-            <a:ext cx="1828800" cy="36576"/>
+            <a:off x="457200" y="1298448"/>
+            <a:ext cx="2194560" cy="36576"/>
           </a:xfrm>
           <a:prstGeom prst="rect">
             <a:avLst/>
@@ -10157,8 +10231,8 @@
         </p:nvSpPr>
         <p:spPr>
           <a:xfrm>
-            <a:off x="457200" y="1463040"/>
-            <a:ext cx="11277295" cy="640080"/>
+            <a:off x="457200" y="1508760"/>
+            <a:ext cx="11277295" cy="502920"/>
           </a:xfrm>
           <a:prstGeom prst="rect">
             <a:avLst/>
@@ -10166,14 +10240,14 @@
           <a:noFill/>
         </p:spPr>
         <p:txBody>
-          <a:bodyPr wrap="square" lIns="45720" rIns="45720" tIns="18288" bIns="18288">
-            <a:spAutoFit/>
+          <a:bodyPr wrap="square" anchor="ctr" lIns="0" rIns="0" tIns="0" bIns="0">
+            <a:noAutofit/>
           </a:bodyPr>
           <a:lstStyle/>
           <a:p>
             <a:pPr algn="l"/>
             <a:r>
-              <a:rPr sz="2200" b="1">
+              <a:rPr sz="2000" b="1" i="0">
                 <a:solidFill>
                   <a:srgbClr val="C0392B"/>
                 </a:solidFill>
@@ -10191,8 +10265,8 @@
         </p:nvSpPr>
         <p:spPr>
           <a:xfrm>
-            <a:off x="640080" y="2286000"/>
-            <a:ext cx="10911535" cy="4069080"/>
+            <a:off x="640080" y="2148840"/>
+            <a:ext cx="10911535" cy="4114800"/>
           </a:xfrm>
           <a:prstGeom prst="rect">
             <a:avLst/>
@@ -10200,15 +10274,18 @@
           <a:noFill/>
         </p:spPr>
         <p:txBody>
-          <a:bodyPr wrap="square" lIns="45720" rIns="45720">
-            <a:spAutoFit/>
+          <a:bodyPr wrap="square" anchor="t" lIns="0" rIns="0" tIns="0" bIns="0">
+            <a:noAutofit/>
           </a:bodyPr>
           <a:lstStyle/>
           <a:p>
             <a:pPr algn="l">
               <a:lnSpc>
-                <a:spcPct val="130000"/>
+                <a:spcPct val="135000"/>
               </a:lnSpc>
+              <a:spcAft>
+                <a:spcPts val="600"/>
+              </a:spcAft>
             </a:pPr>
             <a:r>
               <a:rPr sz="1800">
@@ -10222,8 +10299,11 @@
           <a:p>
             <a:pPr algn="l">
               <a:lnSpc>
-                <a:spcPct val="130000"/>
+                <a:spcPct val="135000"/>
               </a:lnSpc>
+              <a:spcAft>
+                <a:spcPts val="600"/>
+              </a:spcAft>
             </a:pPr>
             <a:r>
               <a:rPr sz="1800">
@@ -10237,8 +10317,11 @@
           <a:p>
             <a:pPr algn="l">
               <a:lnSpc>
-                <a:spcPct val="130000"/>
+                <a:spcPct val="135000"/>
               </a:lnSpc>
+              <a:spcAft>
+                <a:spcPts val="600"/>
+              </a:spcAft>
             </a:pPr>
             <a:r>
               <a:rPr sz="1800">
@@ -10277,8 +10360,8 @@
         </p:nvSpPr>
         <p:spPr>
           <a:xfrm>
-            <a:off x="457200" y="457200"/>
-            <a:ext cx="11277295" cy="822960"/>
+            <a:off x="457200" y="365760"/>
+            <a:ext cx="11277295" cy="914400"/>
           </a:xfrm>
           <a:prstGeom prst="rect">
             <a:avLst/>
@@ -10286,14 +10369,14 @@
           <a:noFill/>
         </p:spPr>
         <p:txBody>
-          <a:bodyPr wrap="square" lIns="45720" rIns="45720" tIns="18288" bIns="18288">
-            <a:spAutoFit/>
+          <a:bodyPr wrap="square" anchor="ctr" lIns="0" rIns="0" tIns="0" bIns="0">
+            <a:noAutofit/>
           </a:bodyPr>
           <a:lstStyle/>
           <a:p>
             <a:pPr algn="l"/>
             <a:r>
-              <a:rPr sz="3000" b="1">
+              <a:rPr sz="2800" b="1" i="0">
                 <a:solidFill>
                   <a:srgbClr val="1F4E78"/>
                 </a:solidFill>
@@ -10311,8 +10394,8 @@
         </p:nvSpPr>
         <p:spPr>
           <a:xfrm>
-            <a:off x="457200" y="1234440"/>
-            <a:ext cx="1828800" cy="36576"/>
+            <a:off x="457200" y="1298448"/>
+            <a:ext cx="2194560" cy="36576"/>
           </a:xfrm>
           <a:prstGeom prst="rect">
             <a:avLst/>
@@ -10354,8 +10437,8 @@
         </p:nvSpPr>
         <p:spPr>
           <a:xfrm>
-            <a:off x="457200" y="1463040"/>
-            <a:ext cx="11277295" cy="640080"/>
+            <a:off x="457200" y="1508760"/>
+            <a:ext cx="11277295" cy="502920"/>
           </a:xfrm>
           <a:prstGeom prst="rect">
             <a:avLst/>
@@ -10363,14 +10446,14 @@
           <a:noFill/>
         </p:spPr>
         <p:txBody>
-          <a:bodyPr wrap="square" lIns="45720" rIns="45720" tIns="18288" bIns="18288">
-            <a:spAutoFit/>
+          <a:bodyPr wrap="square" anchor="ctr" lIns="0" rIns="0" tIns="0" bIns="0">
+            <a:noAutofit/>
           </a:bodyPr>
           <a:lstStyle/>
           <a:p>
             <a:pPr algn="l"/>
             <a:r>
-              <a:rPr sz="2200" b="1">
+              <a:rPr sz="2000" b="1" i="0">
                 <a:solidFill>
                   <a:srgbClr val="C0392B"/>
                 </a:solidFill>
@@ -10388,8 +10471,8 @@
         </p:nvSpPr>
         <p:spPr>
           <a:xfrm>
-            <a:off x="640080" y="2286000"/>
-            <a:ext cx="10911535" cy="4069080"/>
+            <a:off x="640080" y="2148840"/>
+            <a:ext cx="10911535" cy="4114800"/>
           </a:xfrm>
           <a:prstGeom prst="rect">
             <a:avLst/>
@@ -10397,15 +10480,18 @@
           <a:noFill/>
         </p:spPr>
         <p:txBody>
-          <a:bodyPr wrap="square" lIns="45720" rIns="45720">
-            <a:spAutoFit/>
+          <a:bodyPr wrap="square" anchor="t" lIns="0" rIns="0" tIns="0" bIns="0">
+            <a:noAutofit/>
           </a:bodyPr>
           <a:lstStyle/>
           <a:p>
             <a:pPr algn="l">
               <a:lnSpc>
-                <a:spcPct val="130000"/>
+                <a:spcPct val="135000"/>
               </a:lnSpc>
+              <a:spcAft>
+                <a:spcPts val="600"/>
+              </a:spcAft>
             </a:pPr>
             <a:r>
               <a:rPr sz="1800">
@@ -10419,8 +10505,11 @@
           <a:p>
             <a:pPr algn="l">
               <a:lnSpc>
-                <a:spcPct val="130000"/>
+                <a:spcPct val="135000"/>
               </a:lnSpc>
+              <a:spcAft>
+                <a:spcPts val="600"/>
+              </a:spcAft>
             </a:pPr>
             <a:r>
               <a:rPr sz="1800">
@@ -10434,8 +10523,11 @@
           <a:p>
             <a:pPr algn="l">
               <a:lnSpc>
-                <a:spcPct val="130000"/>
+                <a:spcPct val="135000"/>
               </a:lnSpc>
+              <a:spcAft>
+                <a:spcPts val="600"/>
+              </a:spcAft>
             </a:pPr>
             <a:r>
               <a:rPr sz="1800">
@@ -10474,8 +10566,8 @@
         </p:nvSpPr>
         <p:spPr>
           <a:xfrm>
-            <a:off x="457200" y="457200"/>
-            <a:ext cx="11277295" cy="822960"/>
+            <a:off x="457200" y="365760"/>
+            <a:ext cx="11277295" cy="914400"/>
           </a:xfrm>
           <a:prstGeom prst="rect">
             <a:avLst/>
@@ -10483,14 +10575,14 @@
           <a:noFill/>
         </p:spPr>
         <p:txBody>
-          <a:bodyPr wrap="square" lIns="45720" rIns="45720" tIns="18288" bIns="18288">
-            <a:spAutoFit/>
+          <a:bodyPr wrap="square" anchor="ctr" lIns="0" rIns="0" tIns="0" bIns="0">
+            <a:noAutofit/>
           </a:bodyPr>
           <a:lstStyle/>
           <a:p>
             <a:pPr algn="l"/>
             <a:r>
-              <a:rPr sz="3000" b="1">
+              <a:rPr sz="2800" b="1" i="0">
                 <a:solidFill>
                   <a:srgbClr val="1F4E78"/>
                 </a:solidFill>
@@ -10508,8 +10600,8 @@
         </p:nvSpPr>
         <p:spPr>
           <a:xfrm>
-            <a:off x="457200" y="1234440"/>
-            <a:ext cx="1828800" cy="36576"/>
+            <a:off x="457200" y="1298448"/>
+            <a:ext cx="2194560" cy="36576"/>
           </a:xfrm>
           <a:prstGeom prst="rect">
             <a:avLst/>
@@ -10551,8 +10643,8 @@
         </p:nvSpPr>
         <p:spPr>
           <a:xfrm>
-            <a:off x="457200" y="1463040"/>
-            <a:ext cx="11277295" cy="640080"/>
+            <a:off x="457200" y="1508760"/>
+            <a:ext cx="11277295" cy="502920"/>
           </a:xfrm>
           <a:prstGeom prst="rect">
             <a:avLst/>
@@ -10560,14 +10652,14 @@
           <a:noFill/>
         </p:spPr>
         <p:txBody>
-          <a:bodyPr wrap="square" lIns="45720" rIns="45720" tIns="18288" bIns="18288">
-            <a:spAutoFit/>
+          <a:bodyPr wrap="square" anchor="ctr" lIns="0" rIns="0" tIns="0" bIns="0">
+            <a:noAutofit/>
           </a:bodyPr>
           <a:lstStyle/>
           <a:p>
             <a:pPr algn="l"/>
             <a:r>
-              <a:rPr sz="2200" b="1">
+              <a:rPr sz="2000" b="1" i="0">
                 <a:solidFill>
                   <a:srgbClr val="C0392B"/>
                 </a:solidFill>
@@ -10585,8 +10677,8 @@
         </p:nvSpPr>
         <p:spPr>
           <a:xfrm>
-            <a:off x="640080" y="2286000"/>
-            <a:ext cx="10911535" cy="4069080"/>
+            <a:off x="640080" y="2148840"/>
+            <a:ext cx="10911535" cy="4114800"/>
           </a:xfrm>
           <a:prstGeom prst="rect">
             <a:avLst/>
@@ -10594,15 +10686,18 @@
           <a:noFill/>
         </p:spPr>
         <p:txBody>
-          <a:bodyPr wrap="square" lIns="45720" rIns="45720">
-            <a:spAutoFit/>
+          <a:bodyPr wrap="square" anchor="t" lIns="0" rIns="0" tIns="0" bIns="0">
+            <a:noAutofit/>
           </a:bodyPr>
           <a:lstStyle/>
           <a:p>
             <a:pPr algn="l">
               <a:lnSpc>
-                <a:spcPct val="130000"/>
+                <a:spcPct val="135000"/>
               </a:lnSpc>
+              <a:spcAft>
+                <a:spcPts val="600"/>
+              </a:spcAft>
             </a:pPr>
             <a:r>
               <a:rPr sz="1800">
@@ -10616,8 +10711,11 @@
           <a:p>
             <a:pPr algn="l">
               <a:lnSpc>
-                <a:spcPct val="130000"/>
+                <a:spcPct val="135000"/>
               </a:lnSpc>
+              <a:spcAft>
+                <a:spcPts val="600"/>
+              </a:spcAft>
             </a:pPr>
             <a:r>
               <a:rPr sz="1800">
@@ -10631,8 +10729,11 @@
           <a:p>
             <a:pPr algn="l">
               <a:lnSpc>
-                <a:spcPct val="130000"/>
+                <a:spcPct val="135000"/>
               </a:lnSpc>
+              <a:spcAft>
+                <a:spcPts val="600"/>
+              </a:spcAft>
             </a:pPr>
             <a:r>
               <a:rPr sz="1800">
@@ -10671,8 +10772,8 @@
         </p:nvSpPr>
         <p:spPr>
           <a:xfrm>
-            <a:off x="457200" y="457200"/>
-            <a:ext cx="11277295" cy="822960"/>
+            <a:off x="457200" y="365760"/>
+            <a:ext cx="11277295" cy="914400"/>
           </a:xfrm>
           <a:prstGeom prst="rect">
             <a:avLst/>
@@ -10680,14 +10781,14 @@
           <a:noFill/>
         </p:spPr>
         <p:txBody>
-          <a:bodyPr wrap="square" lIns="45720" rIns="45720" tIns="18288" bIns="18288">
-            <a:spAutoFit/>
+          <a:bodyPr wrap="square" anchor="ctr" lIns="0" rIns="0" tIns="0" bIns="0">
+            <a:noAutofit/>
           </a:bodyPr>
           <a:lstStyle/>
           <a:p>
             <a:pPr algn="l"/>
             <a:r>
-              <a:rPr sz="3000" b="1">
+              <a:rPr sz="2800" b="1" i="0">
                 <a:solidFill>
                   <a:srgbClr val="1F4E78"/>
                 </a:solidFill>
@@ -10705,8 +10806,8 @@
         </p:nvSpPr>
         <p:spPr>
           <a:xfrm>
-            <a:off x="457200" y="1234440"/>
-            <a:ext cx="1828800" cy="36576"/>
+            <a:off x="457200" y="1298448"/>
+            <a:ext cx="2194560" cy="36576"/>
           </a:xfrm>
           <a:prstGeom prst="rect">
             <a:avLst/>
@@ -10748,8 +10849,8 @@
         </p:nvSpPr>
         <p:spPr>
           <a:xfrm>
-            <a:off x="457200" y="1463040"/>
-            <a:ext cx="11277295" cy="640080"/>
+            <a:off x="457200" y="1508760"/>
+            <a:ext cx="11277295" cy="502920"/>
           </a:xfrm>
           <a:prstGeom prst="rect">
             <a:avLst/>
@@ -10757,14 +10858,14 @@
           <a:noFill/>
         </p:spPr>
         <p:txBody>
-          <a:bodyPr wrap="square" lIns="45720" rIns="45720" tIns="18288" bIns="18288">
-            <a:spAutoFit/>
+          <a:bodyPr wrap="square" anchor="ctr" lIns="0" rIns="0" tIns="0" bIns="0">
+            <a:noAutofit/>
           </a:bodyPr>
           <a:lstStyle/>
           <a:p>
             <a:pPr algn="l"/>
             <a:r>
-              <a:rPr sz="2200" b="1">
+              <a:rPr sz="2000" b="1" i="0">
                 <a:solidFill>
                   <a:srgbClr val="C0392B"/>
                 </a:solidFill>
@@ -10782,8 +10883,8 @@
         </p:nvSpPr>
         <p:spPr>
           <a:xfrm>
-            <a:off x="640080" y="2286000"/>
-            <a:ext cx="10911535" cy="4069080"/>
+            <a:off x="640080" y="2148840"/>
+            <a:ext cx="10911535" cy="4114800"/>
           </a:xfrm>
           <a:prstGeom prst="rect">
             <a:avLst/>
@@ -10791,15 +10892,18 @@
           <a:noFill/>
         </p:spPr>
         <p:txBody>
-          <a:bodyPr wrap="square" lIns="45720" rIns="45720">
-            <a:spAutoFit/>
+          <a:bodyPr wrap="square" anchor="t" lIns="0" rIns="0" tIns="0" bIns="0">
+            <a:noAutofit/>
           </a:bodyPr>
           <a:lstStyle/>
           <a:p>
             <a:pPr algn="l">
               <a:lnSpc>
-                <a:spcPct val="130000"/>
+                <a:spcPct val="135000"/>
               </a:lnSpc>
+              <a:spcAft>
+                <a:spcPts val="600"/>
+              </a:spcAft>
             </a:pPr>
             <a:r>
               <a:rPr sz="1800">
@@ -10813,8 +10917,11 @@
           <a:p>
             <a:pPr algn="l">
               <a:lnSpc>
-                <a:spcPct val="130000"/>
+                <a:spcPct val="135000"/>
               </a:lnSpc>
+              <a:spcAft>
+                <a:spcPts val="600"/>
+              </a:spcAft>
             </a:pPr>
             <a:r>
               <a:rPr sz="1800">
@@ -10844,14 +10951,14 @@
           <a:noFill/>
         </p:spPr>
         <p:txBody>
-          <a:bodyPr wrap="square" lIns="45720" rIns="45720" tIns="18288" bIns="18288">
-            <a:spAutoFit/>
+          <a:bodyPr wrap="square" anchor="ctr" lIns="0" rIns="0" tIns="0" bIns="0">
+            <a:noAutofit/>
           </a:bodyPr>
           <a:lstStyle/>
           <a:p>
             <a:pPr algn="l"/>
             <a:r>
-              <a:rPr sz="1100" b="0">
+              <a:rPr sz="1100" b="0" i="1">
                 <a:solidFill>
                   <a:srgbClr val="808080"/>
                 </a:solidFill>
@@ -10887,8 +10994,8 @@
         </p:nvSpPr>
         <p:spPr>
           <a:xfrm>
-            <a:off x="457200" y="457200"/>
-            <a:ext cx="11277295" cy="822960"/>
+            <a:off x="457200" y="365760"/>
+            <a:ext cx="11277295" cy="914400"/>
           </a:xfrm>
           <a:prstGeom prst="rect">
             <a:avLst/>
@@ -10896,14 +11003,14 @@
           <a:noFill/>
         </p:spPr>
         <p:txBody>
-          <a:bodyPr wrap="square" lIns="45720" rIns="45720" tIns="18288" bIns="18288">
-            <a:spAutoFit/>
+          <a:bodyPr wrap="square" anchor="ctr" lIns="0" rIns="0" tIns="0" bIns="0">
+            <a:noAutofit/>
           </a:bodyPr>
           <a:lstStyle/>
           <a:p>
             <a:pPr algn="l"/>
             <a:r>
-              <a:rPr sz="3000" b="1">
+              <a:rPr sz="2800" b="1" i="0">
                 <a:solidFill>
                   <a:srgbClr val="1F4E78"/>
                 </a:solidFill>
@@ -10921,8 +11028,8 @@
         </p:nvSpPr>
         <p:spPr>
           <a:xfrm>
-            <a:off x="457200" y="1234440"/>
-            <a:ext cx="1828800" cy="36576"/>
+            <a:off x="457200" y="1298448"/>
+            <a:ext cx="2194560" cy="36576"/>
           </a:xfrm>
           <a:prstGeom prst="rect">
             <a:avLst/>
@@ -10964,8 +11071,8 @@
         </p:nvSpPr>
         <p:spPr>
           <a:xfrm>
-            <a:off x="457200" y="1463040"/>
-            <a:ext cx="11277295" cy="640080"/>
+            <a:off x="457200" y="1508760"/>
+            <a:ext cx="11277295" cy="502920"/>
           </a:xfrm>
           <a:prstGeom prst="rect">
             <a:avLst/>
@@ -10973,14 +11080,14 @@
           <a:noFill/>
         </p:spPr>
         <p:txBody>
-          <a:bodyPr wrap="square" lIns="45720" rIns="45720" tIns="18288" bIns="18288">
-            <a:spAutoFit/>
+          <a:bodyPr wrap="square" anchor="ctr" lIns="0" rIns="0" tIns="0" bIns="0">
+            <a:noAutofit/>
           </a:bodyPr>
           <a:lstStyle/>
           <a:p>
             <a:pPr algn="l"/>
             <a:r>
-              <a:rPr sz="2200" b="1">
+              <a:rPr sz="2000" b="1" i="0">
                 <a:solidFill>
                   <a:srgbClr val="C0392B"/>
                 </a:solidFill>
@@ -10999,7 +11106,7 @@
           <p:nvPr/>
         </p:nvGraphicFramePr>
         <p:xfrm>
-          <a:off x="457200" y="2286000"/>
+          <a:off x="457200" y="2148840"/>
           <a:ext cx="11277295" cy="2743200"/>
         </p:xfrm>
         <a:graphic>
@@ -11442,14 +11549,14 @@
           <a:noFill/>
         </p:spPr>
         <p:txBody>
-          <a:bodyPr wrap="square" lIns="45720" rIns="45720" tIns="18288" bIns="18288">
-            <a:spAutoFit/>
+          <a:bodyPr wrap="square" anchor="ctr" lIns="0" rIns="0" tIns="0" bIns="0">
+            <a:noAutofit/>
           </a:bodyPr>
           <a:lstStyle/>
           <a:p>
             <a:pPr algn="l"/>
             <a:r>
-              <a:rPr sz="1100" b="0">
+              <a:rPr sz="1100" b="0" i="1">
                 <a:solidFill>
                   <a:srgbClr val="808080"/>
                 </a:solidFill>
@@ -11485,8 +11592,8 @@
         </p:nvSpPr>
         <p:spPr>
           <a:xfrm>
-            <a:off x="457200" y="457200"/>
-            <a:ext cx="11277295" cy="822960"/>
+            <a:off x="457200" y="365760"/>
+            <a:ext cx="11277295" cy="914400"/>
           </a:xfrm>
           <a:prstGeom prst="rect">
             <a:avLst/>
@@ -11494,14 +11601,14 @@
           <a:noFill/>
         </p:spPr>
         <p:txBody>
-          <a:bodyPr wrap="square" lIns="45720" rIns="45720" tIns="18288" bIns="18288">
-            <a:spAutoFit/>
+          <a:bodyPr wrap="square" anchor="ctr" lIns="0" rIns="0" tIns="0" bIns="0">
+            <a:noAutofit/>
           </a:bodyPr>
           <a:lstStyle/>
           <a:p>
             <a:pPr algn="l"/>
             <a:r>
-              <a:rPr sz="3000" b="1">
+              <a:rPr sz="2800" b="1" i="0">
                 <a:solidFill>
                   <a:srgbClr val="1F4E78"/>
                 </a:solidFill>
@@ -11519,8 +11626,8 @@
         </p:nvSpPr>
         <p:spPr>
           <a:xfrm>
-            <a:off x="457200" y="1234440"/>
-            <a:ext cx="1828800" cy="36576"/>
+            <a:off x="457200" y="1298448"/>
+            <a:ext cx="2194560" cy="36576"/>
           </a:xfrm>
           <a:prstGeom prst="rect">
             <a:avLst/>
@@ -11562,8 +11669,8 @@
         </p:nvSpPr>
         <p:spPr>
           <a:xfrm>
-            <a:off x="457200" y="1463040"/>
-            <a:ext cx="11277295" cy="640080"/>
+            <a:off x="457200" y="1508760"/>
+            <a:ext cx="11277295" cy="502920"/>
           </a:xfrm>
           <a:prstGeom prst="rect">
             <a:avLst/>
@@ -11571,14 +11678,14 @@
           <a:noFill/>
         </p:spPr>
         <p:txBody>
-          <a:bodyPr wrap="square" lIns="45720" rIns="45720" tIns="18288" bIns="18288">
-            <a:spAutoFit/>
+          <a:bodyPr wrap="square" anchor="ctr" lIns="0" rIns="0" tIns="0" bIns="0">
+            <a:noAutofit/>
           </a:bodyPr>
           <a:lstStyle/>
           <a:p>
             <a:pPr algn="l"/>
             <a:r>
-              <a:rPr sz="2200" b="1">
+              <a:rPr sz="2000" b="1" i="0">
                 <a:solidFill>
                   <a:srgbClr val="C0392B"/>
                 </a:solidFill>
@@ -11596,8 +11703,8 @@
         </p:nvSpPr>
         <p:spPr>
           <a:xfrm>
-            <a:off x="640080" y="2286000"/>
-            <a:ext cx="10911535" cy="4069080"/>
+            <a:off x="640080" y="2148840"/>
+            <a:ext cx="10911535" cy="4114800"/>
           </a:xfrm>
           <a:prstGeom prst="rect">
             <a:avLst/>
@@ -11605,15 +11712,18 @@
           <a:noFill/>
         </p:spPr>
         <p:txBody>
-          <a:bodyPr wrap="square" lIns="45720" rIns="45720">
-            <a:spAutoFit/>
+          <a:bodyPr wrap="square" anchor="t" lIns="0" rIns="0" tIns="0" bIns="0">
+            <a:noAutofit/>
           </a:bodyPr>
           <a:lstStyle/>
           <a:p>
             <a:pPr algn="l">
               <a:lnSpc>
-                <a:spcPct val="130000"/>
+                <a:spcPct val="135000"/>
               </a:lnSpc>
+              <a:spcAft>
+                <a:spcPts val="600"/>
+              </a:spcAft>
             </a:pPr>
             <a:r>
               <a:rPr sz="1800">
@@ -11627,8 +11737,11 @@
           <a:p>
             <a:pPr algn="l">
               <a:lnSpc>
-                <a:spcPct val="130000"/>
+                <a:spcPct val="135000"/>
               </a:lnSpc>
+              <a:spcAft>
+                <a:spcPts val="600"/>
+              </a:spcAft>
             </a:pPr>
             <a:r>
               <a:rPr sz="1800">
@@ -11642,8 +11755,11 @@
           <a:p>
             <a:pPr algn="l">
               <a:lnSpc>
-                <a:spcPct val="130000"/>
+                <a:spcPct val="135000"/>
               </a:lnSpc>
+              <a:spcAft>
+                <a:spcPts val="600"/>
+              </a:spcAft>
             </a:pPr>
             <a:r>
               <a:rPr sz="1800">
@@ -11657,8 +11773,11 @@
           <a:p>
             <a:pPr algn="l">
               <a:lnSpc>
-                <a:spcPct val="130000"/>
+                <a:spcPct val="135000"/>
               </a:lnSpc>
+              <a:spcAft>
+                <a:spcPts val="600"/>
+              </a:spcAft>
             </a:pPr>
             <a:r>
               <a:rPr sz="1800">
@@ -11697,8 +11816,8 @@
         </p:nvSpPr>
         <p:spPr>
           <a:xfrm>
-            <a:off x="457200" y="457200"/>
-            <a:ext cx="11277295" cy="822960"/>
+            <a:off x="457200" y="365760"/>
+            <a:ext cx="11277295" cy="914400"/>
           </a:xfrm>
           <a:prstGeom prst="rect">
             <a:avLst/>
@@ -11706,14 +11825,14 @@
           <a:noFill/>
         </p:spPr>
         <p:txBody>
-          <a:bodyPr wrap="square" lIns="45720" rIns="45720" tIns="18288" bIns="18288">
-            <a:spAutoFit/>
+          <a:bodyPr wrap="square" anchor="ctr" lIns="0" rIns="0" tIns="0" bIns="0">
+            <a:noAutofit/>
           </a:bodyPr>
           <a:lstStyle/>
           <a:p>
             <a:pPr algn="l"/>
             <a:r>
-              <a:rPr sz="3000" b="1">
+              <a:rPr sz="2800" b="1" i="0">
                 <a:solidFill>
                   <a:srgbClr val="1F4E78"/>
                 </a:solidFill>
@@ -11731,8 +11850,8 @@
         </p:nvSpPr>
         <p:spPr>
           <a:xfrm>
-            <a:off x="457200" y="1234440"/>
-            <a:ext cx="1828800" cy="36576"/>
+            <a:off x="457200" y="1298448"/>
+            <a:ext cx="2194560" cy="36576"/>
           </a:xfrm>
           <a:prstGeom prst="rect">
             <a:avLst/>
@@ -11774,8 +11893,8 @@
         </p:nvSpPr>
         <p:spPr>
           <a:xfrm>
-            <a:off x="822960" y="1463040"/>
-            <a:ext cx="10545775" cy="4892040"/>
+            <a:off x="822960" y="2148840"/>
+            <a:ext cx="10545775" cy="4114800"/>
           </a:xfrm>
           <a:prstGeom prst="rect">
             <a:avLst/>
@@ -11783,15 +11902,18 @@
           <a:noFill/>
         </p:spPr>
         <p:txBody>
-          <a:bodyPr wrap="square" lIns="45720" rIns="45720">
-            <a:spAutoFit/>
+          <a:bodyPr wrap="square" anchor="t" lIns="0" rIns="0" tIns="0" bIns="0">
+            <a:noAutofit/>
           </a:bodyPr>
           <a:lstStyle/>
           <a:p>
             <a:pPr algn="l">
               <a:lnSpc>
-                <a:spcPct val="130000"/>
+                <a:spcPct val="135000"/>
               </a:lnSpc>
+              <a:spcAft>
+                <a:spcPts val="600"/>
+              </a:spcAft>
             </a:pPr>
             <a:r>
               <a:rPr sz="2200">
@@ -11805,8 +11927,11 @@
           <a:p>
             <a:pPr algn="l">
               <a:lnSpc>
-                <a:spcPct val="130000"/>
+                <a:spcPct val="135000"/>
               </a:lnSpc>
+              <a:spcAft>
+                <a:spcPts val="600"/>
+              </a:spcAft>
             </a:pPr>
             <a:r>
               <a:rPr sz="2200">
@@ -11820,8 +11945,11 @@
           <a:p>
             <a:pPr algn="l">
               <a:lnSpc>
-                <a:spcPct val="130000"/>
+                <a:spcPct val="135000"/>
               </a:lnSpc>
+              <a:spcAft>
+                <a:spcPts val="600"/>
+              </a:spcAft>
             </a:pPr>
             <a:r>
               <a:rPr sz="2200">
@@ -11835,8 +11963,11 @@
           <a:p>
             <a:pPr algn="l">
               <a:lnSpc>
-                <a:spcPct val="130000"/>
+                <a:spcPct val="135000"/>
               </a:lnSpc>
+              <a:spcAft>
+                <a:spcPts val="600"/>
+              </a:spcAft>
             </a:pPr>
             <a:r>
               <a:rPr sz="2200">
@@ -11850,8 +11981,11 @@
           <a:p>
             <a:pPr algn="l">
               <a:lnSpc>
-                <a:spcPct val="130000"/>
+                <a:spcPct val="135000"/>
               </a:lnSpc>
+              <a:spcAft>
+                <a:spcPts val="600"/>
+              </a:spcAft>
             </a:pPr>
             <a:r>
               <a:rPr sz="2200">
@@ -11942,14 +12076,14 @@
           <a:noFill/>
         </p:spPr>
         <p:txBody>
-          <a:bodyPr wrap="square" lIns="45720" rIns="45720" tIns="18288" bIns="18288">
-            <a:spAutoFit/>
+          <a:bodyPr wrap="square" anchor="ctr" lIns="0" rIns="0" tIns="0" bIns="0">
+            <a:noAutofit/>
           </a:bodyPr>
           <a:lstStyle/>
           <a:p>
             <a:pPr algn="ctr"/>
             <a:r>
-              <a:rPr sz="5800" b="1">
+              <a:rPr sz="5800" b="1" i="0">
                 <a:solidFill>
                   <a:srgbClr val="FFFFFF"/>
                 </a:solidFill>
@@ -11985,8 +12119,8 @@
         </p:nvSpPr>
         <p:spPr>
           <a:xfrm>
-            <a:off x="457200" y="457200"/>
-            <a:ext cx="11277295" cy="822960"/>
+            <a:off x="457200" y="365760"/>
+            <a:ext cx="11277295" cy="914400"/>
           </a:xfrm>
           <a:prstGeom prst="rect">
             <a:avLst/>
@@ -11994,14 +12128,14 @@
           <a:noFill/>
         </p:spPr>
         <p:txBody>
-          <a:bodyPr wrap="square" lIns="45720" rIns="45720" tIns="18288" bIns="18288">
-            <a:spAutoFit/>
+          <a:bodyPr wrap="square" anchor="ctr" lIns="0" rIns="0" tIns="0" bIns="0">
+            <a:noAutofit/>
           </a:bodyPr>
           <a:lstStyle/>
           <a:p>
             <a:pPr algn="l"/>
             <a:r>
-              <a:rPr sz="3000" b="1">
+              <a:rPr sz="2800" b="1" i="0">
                 <a:solidFill>
                   <a:srgbClr val="1F4E78"/>
                 </a:solidFill>
@@ -12019,8 +12153,8 @@
         </p:nvSpPr>
         <p:spPr>
           <a:xfrm>
-            <a:off x="457200" y="1234440"/>
-            <a:ext cx="1828800" cy="36576"/>
+            <a:off x="457200" y="1298448"/>
+            <a:ext cx="2194560" cy="36576"/>
           </a:xfrm>
           <a:prstGeom prst="rect">
             <a:avLst/>
@@ -12062,8 +12196,8 @@
         </p:nvSpPr>
         <p:spPr>
           <a:xfrm>
-            <a:off x="457200" y="1463040"/>
-            <a:ext cx="11277295" cy="640080"/>
+            <a:off x="457200" y="1508760"/>
+            <a:ext cx="11277295" cy="502920"/>
           </a:xfrm>
           <a:prstGeom prst="rect">
             <a:avLst/>
@@ -12071,14 +12205,14 @@
           <a:noFill/>
         </p:spPr>
         <p:txBody>
-          <a:bodyPr wrap="square" lIns="45720" rIns="45720" tIns="18288" bIns="18288">
-            <a:spAutoFit/>
+          <a:bodyPr wrap="square" anchor="ctr" lIns="0" rIns="0" tIns="0" bIns="0">
+            <a:noAutofit/>
           </a:bodyPr>
           <a:lstStyle/>
           <a:p>
             <a:pPr algn="l"/>
             <a:r>
-              <a:rPr sz="2200" b="1">
+              <a:rPr sz="2000" b="1" i="0">
                 <a:solidFill>
                   <a:srgbClr val="C0392B"/>
                 </a:solidFill>
@@ -12097,7 +12231,7 @@
           <p:nvPr/>
         </p:nvGraphicFramePr>
         <p:xfrm>
-          <a:off x="457200" y="2286000"/>
+          <a:off x="457200" y="2148840"/>
           <a:ext cx="11277295" cy="2743200"/>
         </p:xfrm>
         <a:graphic>
@@ -12416,8 +12550,8 @@
         </p:nvSpPr>
         <p:spPr>
           <a:xfrm>
-            <a:off x="457200" y="457200"/>
-            <a:ext cx="11277295" cy="822960"/>
+            <a:off x="457200" y="365760"/>
+            <a:ext cx="11277295" cy="914400"/>
           </a:xfrm>
           <a:prstGeom prst="rect">
             <a:avLst/>
@@ -12425,14 +12559,14 @@
           <a:noFill/>
         </p:spPr>
         <p:txBody>
-          <a:bodyPr wrap="square" lIns="45720" rIns="45720" tIns="18288" bIns="18288">
-            <a:spAutoFit/>
+          <a:bodyPr wrap="square" anchor="ctr" lIns="0" rIns="0" tIns="0" bIns="0">
+            <a:noAutofit/>
           </a:bodyPr>
           <a:lstStyle/>
           <a:p>
             <a:pPr algn="l"/>
             <a:r>
-              <a:rPr sz="3000" b="1">
+              <a:rPr sz="2800" b="1" i="0">
                 <a:solidFill>
                   <a:srgbClr val="1F4E78"/>
                 </a:solidFill>
@@ -12450,8 +12584,8 @@
         </p:nvSpPr>
         <p:spPr>
           <a:xfrm>
-            <a:off x="457200" y="1234440"/>
-            <a:ext cx="1828800" cy="36576"/>
+            <a:off x="457200" y="1298448"/>
+            <a:ext cx="2194560" cy="36576"/>
           </a:xfrm>
           <a:prstGeom prst="rect">
             <a:avLst/>
@@ -12493,8 +12627,8 @@
         </p:nvSpPr>
         <p:spPr>
           <a:xfrm>
-            <a:off x="457200" y="1463040"/>
-            <a:ext cx="11277295" cy="640080"/>
+            <a:off x="457200" y="1508760"/>
+            <a:ext cx="11277295" cy="502920"/>
           </a:xfrm>
           <a:prstGeom prst="rect">
             <a:avLst/>
@@ -12502,14 +12636,14 @@
           <a:noFill/>
         </p:spPr>
         <p:txBody>
-          <a:bodyPr wrap="square" lIns="45720" rIns="45720" tIns="18288" bIns="18288">
-            <a:spAutoFit/>
+          <a:bodyPr wrap="square" anchor="ctr" lIns="0" rIns="0" tIns="0" bIns="0">
+            <a:noAutofit/>
           </a:bodyPr>
           <a:lstStyle/>
           <a:p>
             <a:pPr algn="l"/>
             <a:r>
-              <a:rPr sz="2200" b="1">
+              <a:rPr sz="2000" b="1" i="0">
                 <a:solidFill>
                   <a:srgbClr val="C0392B"/>
                 </a:solidFill>
@@ -12527,8 +12661,8 @@
         </p:nvSpPr>
         <p:spPr>
           <a:xfrm>
-            <a:off x="640080" y="2286000"/>
-            <a:ext cx="10911535" cy="4069080"/>
+            <a:off x="640080" y="2148840"/>
+            <a:ext cx="10911535" cy="4114800"/>
           </a:xfrm>
           <a:prstGeom prst="rect">
             <a:avLst/>
@@ -12536,15 +12670,18 @@
           <a:noFill/>
         </p:spPr>
         <p:txBody>
-          <a:bodyPr wrap="square" lIns="45720" rIns="45720">
-            <a:spAutoFit/>
+          <a:bodyPr wrap="square" anchor="t" lIns="0" rIns="0" tIns="0" bIns="0">
+            <a:noAutofit/>
           </a:bodyPr>
           <a:lstStyle/>
           <a:p>
             <a:pPr algn="l">
               <a:lnSpc>
-                <a:spcPct val="130000"/>
+                <a:spcPct val="135000"/>
               </a:lnSpc>
+              <a:spcAft>
+                <a:spcPts val="600"/>
+              </a:spcAft>
             </a:pPr>
             <a:r>
               <a:rPr sz="1800">
@@ -12558,8 +12695,11 @@
           <a:p>
             <a:pPr algn="l">
               <a:lnSpc>
-                <a:spcPct val="130000"/>
+                <a:spcPct val="135000"/>
               </a:lnSpc>
+              <a:spcAft>
+                <a:spcPts val="600"/>
+              </a:spcAft>
             </a:pPr>
             <a:r>
               <a:rPr sz="1800">
@@ -12573,8 +12713,11 @@
           <a:p>
             <a:pPr algn="l">
               <a:lnSpc>
-                <a:spcPct val="130000"/>
+                <a:spcPct val="135000"/>
               </a:lnSpc>
+              <a:spcAft>
+                <a:spcPts val="600"/>
+              </a:spcAft>
             </a:pPr>
             <a:r>
               <a:rPr sz="1800">
